--- a/decks/workshop-whisperer/workshop-whisperer.pptx
+++ b/decks/workshop-whisperer/workshop-whisperer.pptx
@@ -2726,7 +2726,7 @@
     <p:bg>
       <p:bgPr>
         <a:solidFill>
-          <a:srgbClr val="0F0F1A"/>
+          <a:srgbClr val="0A2540"/>
         </a:solidFill>
       </p:bgPr>
     </p:bg>
@@ -2759,7 +2759,7 @@
             <a:avLst/>
           </a:prstGeom>
           <a:solidFill>
-            <a:srgbClr val="00B4D8">
+            <a:srgbClr val="635BFF">
               <a:alpha val="4000"/>
             </a:srgbClr>
           </a:solidFill>
@@ -2832,11 +2832,11 @@
             <a:r>
               <a:rPr lang="en-US" sz="2200" i="1" dirty="0">
                 <a:solidFill>
-                  <a:srgbClr val="94A3B8"/>
-                </a:solidFill>
-                <a:latin typeface="Calibri" pitchFamily="34" charset="0"/>
-                <a:ea typeface="Calibri" pitchFamily="34" charset="-122"/>
-                <a:cs typeface="Calibri" pitchFamily="34" charset="-120"/>
+                  <a:srgbClr val="8B95A5"/>
+                </a:solidFill>
+                <a:latin typeface="Verdana" pitchFamily="34" charset="0"/>
+                <a:ea typeface="Verdana" pitchFamily="34" charset="-122"/>
+                <a:cs typeface="Verdana" pitchFamily="34" charset="-120"/>
               </a:rPr>
               <a:t>Learn to talk to AI properly</a:t>
             </a:r>
@@ -2858,7 +2858,7 @@
     <p:bg>
       <p:bgPr>
         <a:solidFill>
-          <a:srgbClr val="F8F9FA"/>
+          <a:srgbClr val="FFFFFF"/>
         </a:solidFill>
       </p:bgPr>
     </p:bg>
@@ -2903,7 +2903,7 @@
             <a:r>
               <a:rPr lang="en-US" sz="4400" b="1" dirty="0">
                 <a:solidFill>
-                  <a:srgbClr val="1E293B"/>
+                  <a:srgbClr val="1A1F36"/>
                 </a:solidFill>
                 <a:latin typeface="Georgia" pitchFamily="34" charset="0"/>
                 <a:ea typeface="Georgia" pitchFamily="34" charset="-122"/>
@@ -2942,11 +2942,11 @@
             <a:r>
               <a:rPr lang="en-US" sz="2000" i="1" dirty="0">
                 <a:solidFill>
-                  <a:srgbClr val="00B4D8"/>
-                </a:solidFill>
-                <a:latin typeface="Calibri" pitchFamily="34" charset="0"/>
-                <a:ea typeface="Calibri" pitchFamily="34" charset="-122"/>
-                <a:cs typeface="Calibri" pitchFamily="34" charset="-120"/>
+                  <a:srgbClr val="635BFF"/>
+                </a:solidFill>
+                <a:latin typeface="Verdana" pitchFamily="34" charset="0"/>
+                <a:ea typeface="Verdana" pitchFamily="34" charset="-122"/>
+                <a:cs typeface="Verdana" pitchFamily="34" charset="-120"/>
               </a:rPr>
               <a:t>vs. the vague ask</a:t>
             </a:r>
@@ -2969,7 +2969,7 @@
             <a:avLst/>
           </a:prstGeom>
           <a:solidFill>
-            <a:srgbClr val="FEE2E2"/>
+            <a:srgbClr val="FEE2E8"/>
           </a:solidFill>
           <a:ln/>
         </p:spPr>
@@ -2989,7 +2989,7 @@
             <a:avLst/>
           </a:prstGeom>
           <a:solidFill>
-            <a:srgbClr val="E63946"/>
+            <a:srgbClr val="FF6B8A"/>
           </a:solidFill>
           <a:ln/>
         </p:spPr>
@@ -3021,11 +3021,11 @@
             <a:r>
               <a:rPr lang="en-US" sz="2200" dirty="0">
                 <a:solidFill>
-                  <a:srgbClr val="1E293B"/>
-                </a:solidFill>
-                <a:latin typeface="Calibri" pitchFamily="34" charset="0"/>
-                <a:ea typeface="Calibri" pitchFamily="34" charset="-122"/>
-                <a:cs typeface="Calibri" pitchFamily="34" charset="-120"/>
+                  <a:srgbClr val="1A1F36"/>
+                </a:solidFill>
+                <a:latin typeface="Verdana" pitchFamily="34" charset="0"/>
+                <a:ea typeface="Verdana" pitchFamily="34" charset="-122"/>
+                <a:cs typeface="Verdana" pitchFamily="34" charset="-120"/>
               </a:rPr>
               <a:t>Write me a proposal for</a:t>
             </a:r>
@@ -3038,11 +3038,11 @@
             <a:r>
               <a:rPr lang="en-US" sz="2200" dirty="0">
                 <a:solidFill>
-                  <a:srgbClr val="1E293B"/>
-                </a:solidFill>
-                <a:latin typeface="Calibri" pitchFamily="34" charset="0"/>
-                <a:ea typeface="Calibri" pitchFamily="34" charset="-122"/>
-                <a:cs typeface="Calibri" pitchFamily="34" charset="-120"/>
+                  <a:srgbClr val="1A1F36"/>
+                </a:solidFill>
+                <a:latin typeface="Verdana" pitchFamily="34" charset="0"/>
+                <a:ea typeface="Verdana" pitchFamily="34" charset="-122"/>
+                <a:cs typeface="Verdana" pitchFamily="34" charset="-120"/>
               </a:rPr>
               <a:t>improving our onboarding process.</a:t>
             </a:r>
@@ -3085,7 +3085,7 @@
             <a:avLst/>
           </a:prstGeom>
           <a:solidFill>
-            <a:srgbClr val="2D936C"/>
+            <a:srgbClr val="09825D"/>
           </a:solidFill>
           <a:ln/>
         </p:spPr>
@@ -3117,11 +3117,11 @@
             <a:r>
               <a:rPr lang="en-US" sz="2200" dirty="0">
                 <a:solidFill>
-                  <a:srgbClr val="1E293B"/>
-                </a:solidFill>
-                <a:latin typeface="Calibri" pitchFamily="34" charset="0"/>
-                <a:ea typeface="Calibri" pitchFamily="34" charset="-122"/>
-                <a:cs typeface="Calibri" pitchFamily="34" charset="-120"/>
+                  <a:srgbClr val="1A1F36"/>
+                </a:solidFill>
+                <a:latin typeface="Verdana" pitchFamily="34" charset="0"/>
+                <a:ea typeface="Verdana" pitchFamily="34" charset="-122"/>
+                <a:cs typeface="Verdana" pitchFamily="34" charset="-120"/>
               </a:rPr>
               <a:t>Write a proposal for reducing</a:t>
             </a:r>
@@ -3134,11 +3134,11 @@
             <a:r>
               <a:rPr lang="en-US" sz="2200" dirty="0">
                 <a:solidFill>
-                  <a:srgbClr val="1E293B"/>
-                </a:solidFill>
-                <a:latin typeface="Calibri" pitchFamily="34" charset="0"/>
-                <a:ea typeface="Calibri" pitchFamily="34" charset="-122"/>
-                <a:cs typeface="Calibri" pitchFamily="34" charset="-120"/>
+                  <a:srgbClr val="1A1F36"/>
+                </a:solidFill>
+                <a:latin typeface="Verdana" pitchFamily="34" charset="0"/>
+                <a:ea typeface="Verdana" pitchFamily="34" charset="-122"/>
+                <a:cs typeface="Verdana" pitchFamily="34" charset="-120"/>
               </a:rPr>
               <a:t>onboarding from 4 to 2 weeks,</a:t>
             </a:r>
@@ -3151,11 +3151,11 @@
             <a:r>
               <a:rPr lang="en-US" sz="2200" dirty="0">
                 <a:solidFill>
-                  <a:srgbClr val="1E293B"/>
-                </a:solidFill>
-                <a:latin typeface="Calibri" pitchFamily="34" charset="0"/>
-                <a:ea typeface="Calibri" pitchFamily="34" charset="-122"/>
-                <a:cs typeface="Calibri" pitchFamily="34" charset="-120"/>
+                  <a:srgbClr val="1A1F36"/>
+                </a:solidFill>
+                <a:latin typeface="Verdana" pitchFamily="34" charset="0"/>
+                <a:ea typeface="Verdana" pitchFamily="34" charset="-122"/>
+                <a:cs typeface="Verdana" pitchFamily="34" charset="-120"/>
               </a:rPr>
               <a:t>for the VP of People, under 2 pages.</a:t>
             </a:r>
@@ -3177,7 +3177,7 @@
     <p:bg>
       <p:bgPr>
         <a:solidFill>
-          <a:srgbClr val="0F0F1A"/>
+          <a:srgbClr val="0A2540"/>
         </a:solidFill>
       </p:bgPr>
     </p:bg>
@@ -3210,7 +3210,7 @@
             <a:avLst/>
           </a:prstGeom>
           <a:solidFill>
-            <a:srgbClr val="00B4D8">
+            <a:srgbClr val="635BFF">
               <a:alpha val="4000"/>
             </a:srgbClr>
           </a:solidFill>
@@ -3244,11 +3244,11 @@
             <a:r>
               <a:rPr lang="en-US" sz="2200" b="1" dirty="0">
                 <a:solidFill>
-                  <a:srgbClr val="00B4D8"/>
-                </a:solidFill>
-                <a:latin typeface="Calibri" pitchFamily="34" charset="0"/>
-                <a:ea typeface="Calibri" pitchFamily="34" charset="-122"/>
-                <a:cs typeface="Calibri" pitchFamily="34" charset="-120"/>
+                  <a:srgbClr val="635BFF"/>
+                </a:solidFill>
+                <a:latin typeface="Verdana" pitchFamily="34" charset="0"/>
+                <a:ea typeface="Verdana" pitchFamily="34" charset="-122"/>
+                <a:cs typeface="Verdana" pitchFamily="34" charset="-120"/>
               </a:rPr>
               <a:t>YOUR TURN</a:t>
             </a:r>
@@ -3322,11 +3322,11 @@
             <a:r>
               <a:rPr lang="en-US" sz="2200" dirty="0">
                 <a:solidFill>
-                  <a:srgbClr val="94A3B8"/>
-                </a:solidFill>
-                <a:latin typeface="Calibri" pitchFamily="34" charset="0"/>
-                <a:ea typeface="Calibri" pitchFamily="34" charset="-122"/>
-                <a:cs typeface="Calibri" pitchFamily="34" charset="-120"/>
+                  <a:srgbClr val="8B95A5"/>
+                </a:solidFill>
+                <a:latin typeface="Verdana" pitchFamily="34" charset="0"/>
+                <a:ea typeface="Verdana" pitchFamily="34" charset="-122"/>
+                <a:cs typeface="Verdana" pitchFamily="34" charset="-120"/>
               </a:rPr>
               <a:t>WHO is it for? WHAT are the constraints?</a:t>
             </a:r>
@@ -3339,11 +3339,11 @@
             <a:r>
               <a:rPr lang="en-US" sz="2200" dirty="0">
                 <a:solidFill>
-                  <a:srgbClr val="94A3B8"/>
-                </a:solidFill>
-                <a:latin typeface="Calibri" pitchFamily="34" charset="0"/>
-                <a:ea typeface="Calibri" pitchFamily="34" charset="-122"/>
-                <a:cs typeface="Calibri" pitchFamily="34" charset="-120"/>
+                  <a:srgbClr val="8B95A5"/>
+                </a:solidFill>
+                <a:latin typeface="Verdana" pitchFamily="34" charset="0"/>
+                <a:ea typeface="Verdana" pitchFamily="34" charset="-122"/>
+                <a:cs typeface="Verdana" pitchFamily="34" charset="-120"/>
               </a:rPr>
               <a:t>HOW long should it be?</a:t>
             </a:r>
@@ -3356,11 +3356,11 @@
             <a:r>
               <a:rPr lang="en-US" sz="2200" dirty="0">
                 <a:solidFill>
-                  <a:srgbClr val="94A3B8"/>
-                </a:solidFill>
-                <a:latin typeface="Calibri" pitchFamily="34" charset="0"/>
-                <a:ea typeface="Calibri" pitchFamily="34" charset="-122"/>
-                <a:cs typeface="Calibri" pitchFamily="34" charset="-120"/>
+                  <a:srgbClr val="8B95A5"/>
+                </a:solidFill>
+                <a:latin typeface="Verdana" pitchFamily="34" charset="0"/>
+                <a:ea typeface="Verdana" pitchFamily="34" charset="-122"/>
+                <a:cs typeface="Verdana" pitchFamily="34" charset="-120"/>
               </a:rPr>
               <a:t>Re-run and compare.</a:t>
             </a:r>
@@ -3382,7 +3382,7 @@
     <p:bg>
       <p:bgPr>
         <a:solidFill>
-          <a:srgbClr val="F8F9FA"/>
+          <a:srgbClr val="FFFFFF"/>
         </a:solidFill>
       </p:bgPr>
     </p:bg>
@@ -3427,7 +3427,7 @@
             <a:r>
               <a:rPr lang="en-US" sz="4400" b="1" dirty="0">
                 <a:solidFill>
-                  <a:srgbClr val="1E293B"/>
+                  <a:srgbClr val="1A1F36"/>
                 </a:solidFill>
                 <a:latin typeface="Georgia" pitchFamily="34" charset="0"/>
                 <a:ea typeface="Georgia" pitchFamily="34" charset="-122"/>
@@ -3466,11 +3466,11 @@
             <a:r>
               <a:rPr lang="en-US" sz="2000" i="1" dirty="0">
                 <a:solidFill>
-                  <a:srgbClr val="00B4D8"/>
-                </a:solidFill>
-                <a:latin typeface="Calibri" pitchFamily="34" charset="0"/>
-                <a:ea typeface="Calibri" pitchFamily="34" charset="-122"/>
-                <a:cs typeface="Calibri" pitchFamily="34" charset="-120"/>
+                  <a:srgbClr val="635BFF"/>
+                </a:solidFill>
+                <a:latin typeface="Verdana" pitchFamily="34" charset="0"/>
+                <a:ea typeface="Verdana" pitchFamily="34" charset="-122"/>
+                <a:cs typeface="Verdana" pitchFamily="34" charset="-120"/>
               </a:rPr>
               <a:t>vs. the kitchen sink</a:t>
             </a:r>
@@ -3493,7 +3493,7 @@
             <a:avLst/>
           </a:prstGeom>
           <a:solidFill>
-            <a:srgbClr val="FEE2E2"/>
+            <a:srgbClr val="FEE2E8"/>
           </a:solidFill>
           <a:ln/>
         </p:spPr>
@@ -3513,7 +3513,7 @@
             <a:avLst/>
           </a:prstGeom>
           <a:solidFill>
-            <a:srgbClr val="E63946"/>
+            <a:srgbClr val="FF6B8A"/>
           </a:solidFill>
           <a:ln/>
         </p:spPr>
@@ -3545,11 +3545,11 @@
             <a:r>
               <a:rPr lang="en-US" sz="2200" dirty="0">
                 <a:solidFill>
-                  <a:srgbClr val="1E293B"/>
-                </a:solidFill>
-                <a:latin typeface="Calibri" pitchFamily="34" charset="0"/>
-                <a:ea typeface="Calibri" pitchFamily="34" charset="-122"/>
-                <a:cs typeface="Calibri" pitchFamily="34" charset="-120"/>
+                  <a:srgbClr val="1A1F36"/>
+                </a:solidFill>
+                <a:latin typeface="Verdana" pitchFamily="34" charset="0"/>
+                <a:ea typeface="Verdana" pitchFamily="34" charset="-122"/>
+                <a:cs typeface="Verdana" pitchFamily="34" charset="-120"/>
               </a:rPr>
               <a:t>Write the proposal, draft an email,</a:t>
             </a:r>
@@ -3562,11 +3562,11 @@
             <a:r>
               <a:rPr lang="en-US" sz="2200" dirty="0">
                 <a:solidFill>
-                  <a:srgbClr val="1E293B"/>
-                </a:solidFill>
-                <a:latin typeface="Calibri" pitchFamily="34" charset="0"/>
-                <a:ea typeface="Calibri" pitchFamily="34" charset="-122"/>
-                <a:cs typeface="Calibri" pitchFamily="34" charset="-120"/>
+                  <a:srgbClr val="1A1F36"/>
+                </a:solidFill>
+                <a:latin typeface="Verdana" pitchFamily="34" charset="0"/>
+                <a:ea typeface="Verdana" pitchFamily="34" charset="-122"/>
+                <a:cs typeface="Verdana" pitchFamily="34" charset="-120"/>
               </a:rPr>
               <a:t>create a budget spreadsheet,</a:t>
             </a:r>
@@ -3579,11 +3579,11 @@
             <a:r>
               <a:rPr lang="en-US" sz="2200" dirty="0">
                 <a:solidFill>
-                  <a:srgbClr val="1E293B"/>
-                </a:solidFill>
-                <a:latin typeface="Calibri" pitchFamily="34" charset="0"/>
-                <a:ea typeface="Calibri" pitchFamily="34" charset="-122"/>
-                <a:cs typeface="Calibri" pitchFamily="34" charset="-120"/>
+                  <a:srgbClr val="1A1F36"/>
+                </a:solidFill>
+                <a:latin typeface="Verdana" pitchFamily="34" charset="0"/>
+                <a:ea typeface="Verdana" pitchFamily="34" charset="-122"/>
+                <a:cs typeface="Verdana" pitchFamily="34" charset="-120"/>
               </a:rPr>
               <a:t>and summarize risks.</a:t>
             </a:r>
@@ -3626,7 +3626,7 @@
             <a:avLst/>
           </a:prstGeom>
           <a:solidFill>
-            <a:srgbClr val="2D936C"/>
+            <a:srgbClr val="09825D"/>
           </a:solidFill>
           <a:ln/>
         </p:spPr>
@@ -3658,11 +3658,11 @@
             <a:r>
               <a:rPr lang="en-US" sz="2200" dirty="0">
                 <a:solidFill>
-                  <a:srgbClr val="1E293B"/>
-                </a:solidFill>
-                <a:latin typeface="Calibri" pitchFamily="34" charset="0"/>
-                <a:ea typeface="Calibri" pitchFamily="34" charset="-122"/>
-                <a:cs typeface="Calibri" pitchFamily="34" charset="-120"/>
+                  <a:srgbClr val="1A1F36"/>
+                </a:solidFill>
+                <a:latin typeface="Verdana" pitchFamily="34" charset="0"/>
+                <a:ea typeface="Verdana" pitchFamily="34" charset="-122"/>
+                <a:cs typeface="Verdana" pitchFamily="34" charset="-120"/>
               </a:rPr>
               <a:t>Structure the proposal with:</a:t>
             </a:r>
@@ -3675,11 +3675,11 @@
             <a:r>
               <a:rPr lang="en-US" sz="2200" dirty="0">
                 <a:solidFill>
-                  <a:srgbClr val="1E293B"/>
-                </a:solidFill>
-                <a:latin typeface="Calibri" pitchFamily="34" charset="0"/>
-                <a:ea typeface="Calibri" pitchFamily="34" charset="-122"/>
-                <a:cs typeface="Calibri" pitchFamily="34" charset="-120"/>
+                  <a:srgbClr val="1A1F36"/>
+                </a:solidFill>
+                <a:latin typeface="Verdana" pitchFamily="34" charset="0"/>
+                <a:ea typeface="Verdana" pitchFamily="34" charset="-122"/>
+                <a:cs typeface="Verdana" pitchFamily="34" charset="-120"/>
               </a:rPr>
               <a:t>1. Problem statement</a:t>
             </a:r>
@@ -3692,11 +3692,11 @@
             <a:r>
               <a:rPr lang="en-US" sz="2200" dirty="0">
                 <a:solidFill>
-                  <a:srgbClr val="1E293B"/>
-                </a:solidFill>
-                <a:latin typeface="Calibri" pitchFamily="34" charset="0"/>
-                <a:ea typeface="Calibri" pitchFamily="34" charset="-122"/>
-                <a:cs typeface="Calibri" pitchFamily="34" charset="-120"/>
+                  <a:srgbClr val="1A1F36"/>
+                </a:solidFill>
+                <a:latin typeface="Verdana" pitchFamily="34" charset="0"/>
+                <a:ea typeface="Verdana" pitchFamily="34" charset="-122"/>
+                <a:cs typeface="Verdana" pitchFamily="34" charset="-120"/>
               </a:rPr>
               <a:t>2. Proposed solution</a:t>
             </a:r>
@@ -3709,11 +3709,11 @@
             <a:r>
               <a:rPr lang="en-US" sz="2200" dirty="0">
                 <a:solidFill>
-                  <a:srgbClr val="1E293B"/>
-                </a:solidFill>
-                <a:latin typeface="Calibri" pitchFamily="34" charset="0"/>
-                <a:ea typeface="Calibri" pitchFamily="34" charset="-122"/>
-                <a:cs typeface="Calibri" pitchFamily="34" charset="-120"/>
+                  <a:srgbClr val="1A1F36"/>
+                </a:solidFill>
+                <a:latin typeface="Verdana" pitchFamily="34" charset="0"/>
+                <a:ea typeface="Verdana" pitchFamily="34" charset="-122"/>
+                <a:cs typeface="Verdana" pitchFamily="34" charset="-120"/>
               </a:rPr>
               <a:t>3. Expected outcomes</a:t>
             </a:r>
@@ -3726,11 +3726,11 @@
             <a:r>
               <a:rPr lang="en-US" sz="2200" dirty="0">
                 <a:solidFill>
-                  <a:srgbClr val="1E293B"/>
-                </a:solidFill>
-                <a:latin typeface="Calibri" pitchFamily="34" charset="0"/>
-                <a:ea typeface="Calibri" pitchFamily="34" charset="-122"/>
-                <a:cs typeface="Calibri" pitchFamily="34" charset="-120"/>
+                  <a:srgbClr val="1A1F36"/>
+                </a:solidFill>
+                <a:latin typeface="Verdana" pitchFamily="34" charset="0"/>
+                <a:ea typeface="Verdana" pitchFamily="34" charset="-122"/>
+                <a:cs typeface="Verdana" pitchFamily="34" charset="-120"/>
               </a:rPr>
               <a:t>4. Timeline</a:t>
             </a:r>
@@ -3752,7 +3752,7 @@
     <p:bg>
       <p:bgPr>
         <a:solidFill>
-          <a:srgbClr val="0F0F1A"/>
+          <a:srgbClr val="0A2540"/>
         </a:solidFill>
       </p:bgPr>
     </p:bg>
@@ -3785,7 +3785,7 @@
             <a:avLst/>
           </a:prstGeom>
           <a:solidFill>
-            <a:srgbClr val="00B4D8">
+            <a:srgbClr val="635BFF">
               <a:alpha val="4000"/>
             </a:srgbClr>
           </a:solidFill>
@@ -3819,11 +3819,11 @@
             <a:r>
               <a:rPr lang="en-US" sz="2200" b="1" dirty="0">
                 <a:solidFill>
-                  <a:srgbClr val="00B4D8"/>
-                </a:solidFill>
-                <a:latin typeface="Calibri" pitchFamily="34" charset="0"/>
-                <a:ea typeface="Calibri" pitchFamily="34" charset="-122"/>
-                <a:cs typeface="Calibri" pitchFamily="34" charset="-120"/>
+                  <a:srgbClr val="635BFF"/>
+                </a:solidFill>
+                <a:latin typeface="Verdana" pitchFamily="34" charset="0"/>
+                <a:ea typeface="Verdana" pitchFamily="34" charset="-122"/>
+                <a:cs typeface="Verdana" pitchFamily="34" charset="-120"/>
               </a:rPr>
               <a:t>YOUR TURN</a:t>
             </a:r>
@@ -3897,11 +3897,11 @@
             <a:r>
               <a:rPr lang="en-US" sz="2200" dirty="0">
                 <a:solidFill>
-                  <a:srgbClr val="94A3B8"/>
-                </a:solidFill>
-                <a:latin typeface="Calibri" pitchFamily="34" charset="0"/>
-                <a:ea typeface="Calibri" pitchFamily="34" charset="-122"/>
-                <a:cs typeface="Calibri" pitchFamily="34" charset="-120"/>
+                  <a:srgbClr val="8B95A5"/>
+                </a:solidFill>
+                <a:latin typeface="Verdana" pitchFamily="34" charset="0"/>
+                <a:ea typeface="Verdana" pitchFamily="34" charset="-122"/>
+                <a:cs typeface="Verdana" pitchFamily="34" charset="-120"/>
               </a:rPr>
               <a:t>Add numbered sections or clear steps.</a:t>
             </a:r>
@@ -3914,11 +3914,11 @@
             <a:r>
               <a:rPr lang="en-US" sz="2200" dirty="0">
                 <a:solidFill>
-                  <a:srgbClr val="94A3B8"/>
-                </a:solidFill>
-                <a:latin typeface="Calibri" pitchFamily="34" charset="0"/>
-                <a:ea typeface="Calibri" pitchFamily="34" charset="-122"/>
-                <a:cs typeface="Calibri" pitchFamily="34" charset="-120"/>
+                  <a:srgbClr val="8B95A5"/>
+                </a:solidFill>
+                <a:latin typeface="Verdana" pitchFamily="34" charset="0"/>
+                <a:ea typeface="Verdana" pitchFamily="34" charset="-122"/>
+                <a:cs typeface="Verdana" pitchFamily="34" charset="-120"/>
               </a:rPr>
               <a:t>Re-run and compare.</a:t>
             </a:r>
@@ -3940,7 +3940,7 @@
     <p:bg>
       <p:bgPr>
         <a:solidFill>
-          <a:srgbClr val="F8F9FA"/>
+          <a:srgbClr val="FFFFFF"/>
         </a:solidFill>
       </p:bgPr>
     </p:bg>
@@ -3985,7 +3985,7 @@
             <a:r>
               <a:rPr lang="en-US" sz="4400" b="1" dirty="0">
                 <a:solidFill>
-                  <a:srgbClr val="1E293B"/>
+                  <a:srgbClr val="1A1F36"/>
                 </a:solidFill>
                 <a:latin typeface="Georgia" pitchFamily="34" charset="0"/>
                 <a:ea typeface="Georgia" pitchFamily="34" charset="-122"/>
@@ -4024,11 +4024,11 @@
             <a:r>
               <a:rPr lang="en-US" sz="2000" i="1" dirty="0">
                 <a:solidFill>
-                  <a:srgbClr val="00B4D8"/>
-                </a:solidFill>
-                <a:latin typeface="Calibri" pitchFamily="34" charset="0"/>
-                <a:ea typeface="Calibri" pitchFamily="34" charset="-122"/>
-                <a:cs typeface="Calibri" pitchFamily="34" charset="-120"/>
+                  <a:srgbClr val="635BFF"/>
+                </a:solidFill>
+                <a:latin typeface="Verdana" pitchFamily="34" charset="0"/>
+                <a:ea typeface="Verdana" pitchFamily="34" charset="-122"/>
+                <a:cs typeface="Verdana" pitchFamily="34" charset="-120"/>
               </a:rPr>
               <a:t>vs. leading the witness</a:t>
             </a:r>
@@ -4051,7 +4051,7 @@
             <a:avLst/>
           </a:prstGeom>
           <a:solidFill>
-            <a:srgbClr val="FEE2E2"/>
+            <a:srgbClr val="FEE2E8"/>
           </a:solidFill>
           <a:ln/>
         </p:spPr>
@@ -4071,7 +4071,7 @@
             <a:avLst/>
           </a:prstGeom>
           <a:solidFill>
-            <a:srgbClr val="E63946"/>
+            <a:srgbClr val="FF6B8A"/>
           </a:solidFill>
           <a:ln/>
         </p:spPr>
@@ -4103,11 +4103,11 @@
             <a:r>
               <a:rPr lang="en-US" sz="2200" dirty="0">
                 <a:solidFill>
-                  <a:srgbClr val="1E293B"/>
-                </a:solidFill>
-                <a:latin typeface="Calibri" pitchFamily="34" charset="0"/>
-                <a:ea typeface="Calibri" pitchFamily="34" charset="-122"/>
-                <a:cs typeface="Calibri" pitchFamily="34" charset="-120"/>
+                  <a:srgbClr val="1A1F36"/>
+                </a:solidFill>
+                <a:latin typeface="Verdana" pitchFamily="34" charset="0"/>
+                <a:ea typeface="Verdana" pitchFamily="34" charset="-122"/>
+                <a:cs typeface="Verdana" pitchFamily="34" charset="-120"/>
               </a:rPr>
               <a:t>Don't you think reducing</a:t>
             </a:r>
@@ -4120,11 +4120,11 @@
             <a:r>
               <a:rPr lang="en-US" sz="2200" dirty="0">
                 <a:solidFill>
-                  <a:srgbClr val="1E293B"/>
-                </a:solidFill>
-                <a:latin typeface="Calibri" pitchFamily="34" charset="0"/>
-                <a:ea typeface="Calibri" pitchFamily="34" charset="-122"/>
-                <a:cs typeface="Calibri" pitchFamily="34" charset="-120"/>
+                  <a:srgbClr val="1A1F36"/>
+                </a:solidFill>
+                <a:latin typeface="Verdana" pitchFamily="34" charset="0"/>
+                <a:ea typeface="Verdana" pitchFamily="34" charset="-122"/>
+                <a:cs typeface="Verdana" pitchFamily="34" charset="-120"/>
               </a:rPr>
               <a:t>onboarding to 2 weeks</a:t>
             </a:r>
@@ -4137,11 +4137,11 @@
             <a:r>
               <a:rPr lang="en-US" sz="2200" dirty="0">
                 <a:solidFill>
-                  <a:srgbClr val="1E293B"/>
-                </a:solidFill>
-                <a:latin typeface="Calibri" pitchFamily="34" charset="0"/>
-                <a:ea typeface="Calibri" pitchFamily="34" charset="-122"/>
-                <a:cs typeface="Calibri" pitchFamily="34" charset="-120"/>
+                  <a:srgbClr val="1A1F36"/>
+                </a:solidFill>
+                <a:latin typeface="Verdana" pitchFamily="34" charset="0"/>
+                <a:ea typeface="Verdana" pitchFamily="34" charset="-122"/>
+                <a:cs typeface="Verdana" pitchFamily="34" charset="-120"/>
               </a:rPr>
               <a:t>would be great?</a:t>
             </a:r>
@@ -4184,7 +4184,7 @@
             <a:avLst/>
           </a:prstGeom>
           <a:solidFill>
-            <a:srgbClr val="2D936C"/>
+            <a:srgbClr val="09825D"/>
           </a:solidFill>
           <a:ln/>
         </p:spPr>
@@ -4216,11 +4216,11 @@
             <a:r>
               <a:rPr lang="en-US" sz="2200" dirty="0">
                 <a:solidFill>
-                  <a:srgbClr val="1E293B"/>
-                </a:solidFill>
-                <a:latin typeface="Calibri" pitchFamily="34" charset="0"/>
-                <a:ea typeface="Calibri" pitchFamily="34" charset="-122"/>
-                <a:cs typeface="Calibri" pitchFamily="34" charset="-120"/>
+                  <a:srgbClr val="1A1F36"/>
+                </a:solidFill>
+                <a:latin typeface="Verdana" pitchFamily="34" charset="0"/>
+                <a:ea typeface="Verdana" pitchFamily="34" charset="-122"/>
+                <a:cs typeface="Verdana" pitchFamily="34" charset="-120"/>
               </a:rPr>
               <a:t>Be radically honest about challenges.</a:t>
             </a:r>
@@ -4233,11 +4233,11 @@
             <a:r>
               <a:rPr lang="en-US" sz="2200" dirty="0">
                 <a:solidFill>
-                  <a:srgbClr val="1E293B"/>
-                </a:solidFill>
-                <a:latin typeface="Calibri" pitchFamily="34" charset="0"/>
-                <a:ea typeface="Calibri" pitchFamily="34" charset="-122"/>
-                <a:cs typeface="Calibri" pitchFamily="34" charset="-120"/>
+                  <a:srgbClr val="1A1F36"/>
+                </a:solidFill>
+                <a:latin typeface="Verdana" pitchFamily="34" charset="0"/>
+                <a:ea typeface="Verdana" pitchFamily="34" charset="-122"/>
+                <a:cs typeface="Verdana" pitchFamily="34" charset="-120"/>
               </a:rPr>
               <a:t>Think step by step.</a:t>
             </a:r>
@@ -4250,11 +4250,11 @@
             <a:r>
               <a:rPr lang="en-US" sz="2200" dirty="0">
                 <a:solidFill>
-                  <a:srgbClr val="1E293B"/>
-                </a:solidFill>
-                <a:latin typeface="Calibri" pitchFamily="34" charset="0"/>
-                <a:ea typeface="Calibri" pitchFamily="34" charset="-122"/>
-                <a:cs typeface="Calibri" pitchFamily="34" charset="-120"/>
+                  <a:srgbClr val="1A1F36"/>
+                </a:solidFill>
+                <a:latin typeface="Verdana" pitchFamily="34" charset="0"/>
+                <a:ea typeface="Verdana" pitchFamily="34" charset="-122"/>
+                <a:cs typeface="Verdana" pitchFamily="34" charset="-120"/>
               </a:rPr>
               <a:t>Challenge my assumptions.</a:t>
             </a:r>
@@ -4276,7 +4276,7 @@
     <p:bg>
       <p:bgPr>
         <a:solidFill>
-          <a:srgbClr val="0F0F1A"/>
+          <a:srgbClr val="0A2540"/>
         </a:solidFill>
       </p:bgPr>
     </p:bg>
@@ -4309,7 +4309,7 @@
             <a:avLst/>
           </a:prstGeom>
           <a:solidFill>
-            <a:srgbClr val="00B4D8">
+            <a:srgbClr val="635BFF">
               <a:alpha val="4000"/>
             </a:srgbClr>
           </a:solidFill>
@@ -4343,11 +4343,11 @@
             <a:r>
               <a:rPr lang="en-US" sz="2200" b="1" dirty="0">
                 <a:solidFill>
-                  <a:srgbClr val="00B4D8"/>
-                </a:solidFill>
-                <a:latin typeface="Calibri" pitchFamily="34" charset="0"/>
-                <a:ea typeface="Calibri" pitchFamily="34" charset="-122"/>
-                <a:cs typeface="Calibri" pitchFamily="34" charset="-120"/>
+                  <a:srgbClr val="635BFF"/>
+                </a:solidFill>
+                <a:latin typeface="Verdana" pitchFamily="34" charset="0"/>
+                <a:ea typeface="Verdana" pitchFamily="34" charset="-122"/>
+                <a:cs typeface="Verdana" pitchFamily="34" charset="-120"/>
               </a:rPr>
               <a:t>YOUR TURN</a:t>
             </a:r>
@@ -4421,11 +4421,11 @@
             <a:r>
               <a:rPr lang="en-US" sz="2200" dirty="0">
                 <a:solidFill>
-                  <a:srgbClr val="94A3B8"/>
-                </a:solidFill>
-                <a:latin typeface="Calibri" pitchFamily="34" charset="0"/>
-                <a:ea typeface="Calibri" pitchFamily="34" charset="-122"/>
-                <a:cs typeface="Calibri" pitchFamily="34" charset="-120"/>
+                  <a:srgbClr val="8B95A5"/>
+                </a:solidFill>
+                <a:latin typeface="Verdana" pitchFamily="34" charset="0"/>
+                <a:ea typeface="Verdana" pitchFamily="34" charset="-122"/>
+                <a:cs typeface="Verdana" pitchFamily="34" charset="-120"/>
               </a:rPr>
               <a:t>"Be radically honest."</a:t>
             </a:r>
@@ -4438,11 +4438,11 @@
             <a:r>
               <a:rPr lang="en-US" sz="2200" dirty="0">
                 <a:solidFill>
-                  <a:srgbClr val="94A3B8"/>
-                </a:solidFill>
-                <a:latin typeface="Calibri" pitchFamily="34" charset="0"/>
-                <a:ea typeface="Calibri" pitchFamily="34" charset="-122"/>
-                <a:cs typeface="Calibri" pitchFamily="34" charset="-120"/>
+                  <a:srgbClr val="8B95A5"/>
+                </a:solidFill>
+                <a:latin typeface="Verdana" pitchFamily="34" charset="0"/>
+                <a:ea typeface="Verdana" pitchFamily="34" charset="-122"/>
+                <a:cs typeface="Verdana" pitchFamily="34" charset="-120"/>
               </a:rPr>
               <a:t>"Think step by step."</a:t>
             </a:r>
@@ -4455,11 +4455,11 @@
             <a:r>
               <a:rPr lang="en-US" sz="2200" dirty="0">
                 <a:solidFill>
-                  <a:srgbClr val="94A3B8"/>
-                </a:solidFill>
-                <a:latin typeface="Calibri" pitchFamily="34" charset="0"/>
-                <a:ea typeface="Calibri" pitchFamily="34" charset="-122"/>
-                <a:cs typeface="Calibri" pitchFamily="34" charset="-120"/>
+                  <a:srgbClr val="8B95A5"/>
+                </a:solidFill>
+                <a:latin typeface="Verdana" pitchFamily="34" charset="0"/>
+                <a:ea typeface="Verdana" pitchFamily="34" charset="-122"/>
+                <a:cs typeface="Verdana" pitchFamily="34" charset="-120"/>
               </a:rPr>
               <a:t>"Challenge my assumptions."</a:t>
             </a:r>
@@ -4472,11 +4472,11 @@
             <a:r>
               <a:rPr lang="en-US" sz="2200" dirty="0">
                 <a:solidFill>
-                  <a:srgbClr val="94A3B8"/>
-                </a:solidFill>
-                <a:latin typeface="Calibri" pitchFamily="34" charset="0"/>
-                <a:ea typeface="Calibri" pitchFamily="34" charset="-122"/>
-                <a:cs typeface="Calibri" pitchFamily="34" charset="-120"/>
+                  <a:srgbClr val="8B95A5"/>
+                </a:solidFill>
+                <a:latin typeface="Verdana" pitchFamily="34" charset="0"/>
+                <a:ea typeface="Verdana" pitchFamily="34" charset="-122"/>
+                <a:cs typeface="Verdana" pitchFamily="34" charset="-120"/>
               </a:rPr>
               <a:t>Re-run and compare.</a:t>
             </a:r>
@@ -4498,7 +4498,7 @@
     <p:bg>
       <p:bgPr>
         <a:solidFill>
-          <a:srgbClr val="F8F9FA"/>
+          <a:srgbClr val="FFFFFF"/>
         </a:solidFill>
       </p:bgPr>
     </p:bg>
@@ -4543,7 +4543,7 @@
             <a:r>
               <a:rPr lang="en-US" sz="4400" b="1" dirty="0">
                 <a:solidFill>
-                  <a:srgbClr val="1E293B"/>
+                  <a:srgbClr val="1A1F36"/>
                 </a:solidFill>
                 <a:latin typeface="Georgia" pitchFamily="34" charset="0"/>
                 <a:ea typeface="Georgia" pitchFamily="34" charset="-122"/>
@@ -4582,11 +4582,11 @@
             <a:r>
               <a:rPr lang="en-US" sz="2000" i="1" dirty="0">
                 <a:solidFill>
-                  <a:srgbClr val="00B4D8"/>
-                </a:solidFill>
-                <a:latin typeface="Calibri" pitchFamily="34" charset="0"/>
-                <a:ea typeface="Calibri" pitchFamily="34" charset="-122"/>
-                <a:cs typeface="Calibri" pitchFamily="34" charset="-120"/>
+                  <a:srgbClr val="635BFF"/>
+                </a:solidFill>
+                <a:latin typeface="Verdana" pitchFamily="34" charset="0"/>
+                <a:ea typeface="Verdana" pitchFamily="34" charset="-122"/>
+                <a:cs typeface="Verdana" pitchFamily="34" charset="-120"/>
               </a:rPr>
               <a:t>vs. hoping for the best</a:t>
             </a:r>
@@ -4609,7 +4609,7 @@
             <a:avLst/>
           </a:prstGeom>
           <a:solidFill>
-            <a:srgbClr val="FEE2E2"/>
+            <a:srgbClr val="FEE2E8"/>
           </a:solidFill>
           <a:ln/>
         </p:spPr>
@@ -4629,7 +4629,7 @@
             <a:avLst/>
           </a:prstGeom>
           <a:solidFill>
-            <a:srgbClr val="E63946"/>
+            <a:srgbClr val="FF6B8A"/>
           </a:solidFill>
           <a:ln/>
         </p:spPr>
@@ -4661,11 +4661,11 @@
             <a:r>
               <a:rPr lang="en-US" sz="2200" dirty="0">
                 <a:solidFill>
-                  <a:srgbClr val="1E293B"/>
-                </a:solidFill>
-                <a:latin typeface="Calibri" pitchFamily="34" charset="0"/>
-                <a:ea typeface="Calibri" pitchFamily="34" charset="-122"/>
-                <a:cs typeface="Calibri" pitchFamily="34" charset="-120"/>
+                  <a:srgbClr val="1A1F36"/>
+                </a:solidFill>
+                <a:latin typeface="Verdana" pitchFamily="34" charset="0"/>
+                <a:ea typeface="Verdana" pitchFamily="34" charset="-122"/>
+                <a:cs typeface="Verdana" pitchFamily="34" charset="-120"/>
               </a:rPr>
               <a:t>(No format guidance)</a:t>
             </a:r>
@@ -4678,11 +4678,11 @@
             <a:r>
               <a:rPr lang="en-US" sz="2200" dirty="0">
                 <a:solidFill>
-                  <a:srgbClr val="1E293B"/>
-                </a:solidFill>
-                <a:latin typeface="Calibri" pitchFamily="34" charset="0"/>
-                <a:ea typeface="Calibri" pitchFamily="34" charset="-122"/>
-                <a:cs typeface="Calibri" pitchFamily="34" charset="-120"/>
+                  <a:srgbClr val="1A1F36"/>
+                </a:solidFill>
+                <a:latin typeface="Verdana" pitchFamily="34" charset="0"/>
+                <a:ea typeface="Verdana" pitchFamily="34" charset="-122"/>
+                <a:cs typeface="Verdana" pitchFamily="34" charset="-120"/>
               </a:rPr>
               <a:t>→ Random format, 5-page essay</a:t>
             </a:r>
@@ -4695,11 +4695,11 @@
             <a:r>
               <a:rPr lang="en-US" sz="2200" dirty="0">
                 <a:solidFill>
-                  <a:srgbClr val="1E293B"/>
-                </a:solidFill>
-                <a:latin typeface="Calibri" pitchFamily="34" charset="0"/>
-                <a:ea typeface="Calibri" pitchFamily="34" charset="-122"/>
-                <a:cs typeface="Calibri" pitchFamily="34" charset="-120"/>
+                  <a:srgbClr val="1A1F36"/>
+                </a:solidFill>
+                <a:latin typeface="Verdana" pitchFamily="34" charset="0"/>
+                <a:ea typeface="Verdana" pitchFamily="34" charset="-122"/>
+                <a:cs typeface="Verdana" pitchFamily="34" charset="-120"/>
               </a:rPr>
               <a:t>when you needed bullets.</a:t>
             </a:r>
@@ -4742,7 +4742,7 @@
             <a:avLst/>
           </a:prstGeom>
           <a:solidFill>
-            <a:srgbClr val="2D936C"/>
+            <a:srgbClr val="09825D"/>
           </a:solidFill>
           <a:ln/>
         </p:spPr>
@@ -4774,11 +4774,11 @@
             <a:r>
               <a:rPr lang="en-US" sz="2200" dirty="0">
                 <a:solidFill>
-                  <a:srgbClr val="1E293B"/>
-                </a:solidFill>
-                <a:latin typeface="Calibri" pitchFamily="34" charset="0"/>
-                <a:ea typeface="Calibri" pitchFamily="34" charset="-122"/>
-                <a:cs typeface="Calibri" pitchFamily="34" charset="-120"/>
+                  <a:srgbClr val="1A1F36"/>
+                </a:solidFill>
+                <a:latin typeface="Verdana" pitchFamily="34" charset="0"/>
+                <a:ea typeface="Verdana" pitchFamily="34" charset="-122"/>
+                <a:cs typeface="Verdana" pitchFamily="34" charset="-120"/>
               </a:rPr>
               <a:t>One-page executive brief with</a:t>
             </a:r>
@@ -4791,11 +4791,11 @@
             <a:r>
               <a:rPr lang="en-US" sz="2200" dirty="0">
                 <a:solidFill>
-                  <a:srgbClr val="1E293B"/>
-                </a:solidFill>
-                <a:latin typeface="Calibri" pitchFamily="34" charset="0"/>
-                <a:ea typeface="Calibri" pitchFamily="34" charset="-122"/>
-                <a:cs typeface="Calibri" pitchFamily="34" charset="-120"/>
+                  <a:srgbClr val="1A1F36"/>
+                </a:solidFill>
+                <a:latin typeface="Verdana" pitchFamily="34" charset="0"/>
+                <a:ea typeface="Verdana" pitchFamily="34" charset="-122"/>
+                <a:cs typeface="Verdana" pitchFamily="34" charset="-120"/>
               </a:rPr>
               <a:t>bullet points. Data-driven language.</a:t>
             </a:r>
@@ -4808,11 +4808,11 @@
             <a:r>
               <a:rPr lang="en-US" sz="2200" dirty="0">
                 <a:solidFill>
-                  <a:srgbClr val="1E293B"/>
-                </a:solidFill>
-                <a:latin typeface="Calibri" pitchFamily="34" charset="0"/>
-                <a:ea typeface="Calibri" pitchFamily="34" charset="-122"/>
-                <a:cs typeface="Calibri" pitchFamily="34" charset="-120"/>
+                  <a:srgbClr val="1A1F36"/>
+                </a:solidFill>
+                <a:latin typeface="Verdana" pitchFamily="34" charset="0"/>
+                <a:ea typeface="Verdana" pitchFamily="34" charset="-122"/>
+                <a:cs typeface="Verdana" pitchFamily="34" charset="-120"/>
               </a:rPr>
               <a:t>Reader has 2 minutes.</a:t>
             </a:r>
@@ -4834,7 +4834,7 @@
     <p:bg>
       <p:bgPr>
         <a:solidFill>
-          <a:srgbClr val="0F0F1A"/>
+          <a:srgbClr val="0A2540"/>
         </a:solidFill>
       </p:bgPr>
     </p:bg>
@@ -4867,7 +4867,7 @@
             <a:avLst/>
           </a:prstGeom>
           <a:solidFill>
-            <a:srgbClr val="00B4D8">
+            <a:srgbClr val="635BFF">
               <a:alpha val="4000"/>
             </a:srgbClr>
           </a:solidFill>
@@ -4901,11 +4901,11 @@
             <a:r>
               <a:rPr lang="en-US" sz="2200" b="1" dirty="0">
                 <a:solidFill>
-                  <a:srgbClr val="00B4D8"/>
-                </a:solidFill>
-                <a:latin typeface="Calibri" pitchFamily="34" charset="0"/>
-                <a:ea typeface="Calibri" pitchFamily="34" charset="-122"/>
-                <a:cs typeface="Calibri" pitchFamily="34" charset="-120"/>
+                  <a:srgbClr val="635BFF"/>
+                </a:solidFill>
+                <a:latin typeface="Verdana" pitchFamily="34" charset="0"/>
+                <a:ea typeface="Verdana" pitchFamily="34" charset="-122"/>
+                <a:cs typeface="Verdana" pitchFamily="34" charset="-120"/>
               </a:rPr>
               <a:t>YOUR TURN</a:t>
             </a:r>
@@ -4979,11 +4979,11 @@
             <a:r>
               <a:rPr lang="en-US" sz="2200" dirty="0">
                 <a:solidFill>
-                  <a:srgbClr val="94A3B8"/>
-                </a:solidFill>
-                <a:latin typeface="Calibri" pitchFamily="34" charset="0"/>
-                <a:ea typeface="Calibri" pitchFamily="34" charset="-122"/>
-                <a:cs typeface="Calibri" pitchFamily="34" charset="-120"/>
+                  <a:srgbClr val="8B95A5"/>
+                </a:solidFill>
+                <a:latin typeface="Verdana" pitchFamily="34" charset="0"/>
+                <a:ea typeface="Verdana" pitchFamily="34" charset="-122"/>
+                <a:cs typeface="Verdana" pitchFamily="34" charset="-120"/>
               </a:rPr>
               <a:t>Format, tone, length, audience.</a:t>
             </a:r>
@@ -4996,11 +4996,11 @@
             <a:r>
               <a:rPr lang="en-US" sz="2200" dirty="0">
                 <a:solidFill>
-                  <a:srgbClr val="94A3B8"/>
-                </a:solidFill>
-                <a:latin typeface="Calibri" pitchFamily="34" charset="0"/>
-                <a:ea typeface="Calibri" pitchFamily="34" charset="-122"/>
-                <a:cs typeface="Calibri" pitchFamily="34" charset="-120"/>
+                  <a:srgbClr val="8B95A5"/>
+                </a:solidFill>
+                <a:latin typeface="Verdana" pitchFamily="34" charset="0"/>
+                <a:ea typeface="Verdana" pitchFamily="34" charset="-122"/>
+                <a:cs typeface="Verdana" pitchFamily="34" charset="-120"/>
               </a:rPr>
               <a:t>"One-page brief with bullets. Direct tone."</a:t>
             </a:r>
@@ -5013,11 +5013,11 @@
             <a:r>
               <a:rPr lang="en-US" sz="2200" dirty="0">
                 <a:solidFill>
-                  <a:srgbClr val="94A3B8"/>
-                </a:solidFill>
-                <a:latin typeface="Calibri" pitchFamily="34" charset="0"/>
-                <a:ea typeface="Calibri" pitchFamily="34" charset="-122"/>
-                <a:cs typeface="Calibri" pitchFamily="34" charset="-120"/>
+                  <a:srgbClr val="8B95A5"/>
+                </a:solidFill>
+                <a:latin typeface="Verdana" pitchFamily="34" charset="0"/>
+                <a:ea typeface="Verdana" pitchFamily="34" charset="-122"/>
+                <a:cs typeface="Verdana" pitchFamily="34" charset="-120"/>
               </a:rPr>
               <a:t>Re-run and compare.</a:t>
             </a:r>
@@ -5039,7 +5039,7 @@
     <p:bg>
       <p:bgPr>
         <a:solidFill>
-          <a:srgbClr val="0F0F1A"/>
+          <a:srgbClr val="0A2540"/>
         </a:solidFill>
       </p:bgPr>
     </p:bg>
@@ -5072,7 +5072,7 @@
             <a:avLst/>
           </a:prstGeom>
           <a:solidFill>
-            <a:srgbClr val="00B4D8">
+            <a:srgbClr val="635BFF">
               <a:alpha val="4000"/>
             </a:srgbClr>
           </a:solidFill>
@@ -5106,11 +5106,11 @@
             <a:r>
               <a:rPr lang="en-US" sz="2200" b="1" dirty="0">
                 <a:solidFill>
-                  <a:srgbClr val="00B4D8"/>
-                </a:solidFill>
-                <a:latin typeface="Calibri" pitchFamily="34" charset="0"/>
-                <a:ea typeface="Calibri" pitchFamily="34" charset="-122"/>
-                <a:cs typeface="Calibri" pitchFamily="34" charset="-120"/>
+                  <a:srgbClr val="635BFF"/>
+                </a:solidFill>
+                <a:latin typeface="Verdana" pitchFamily="34" charset="0"/>
+                <a:ea typeface="Verdana" pitchFamily="34" charset="-122"/>
+                <a:cs typeface="Verdana" pitchFamily="34" charset="-120"/>
               </a:rPr>
               <a:t>YOUR TURN</a:t>
             </a:r>
@@ -5201,11 +5201,11 @@
             <a:r>
               <a:rPr lang="en-US" sz="2200" dirty="0">
                 <a:solidFill>
-                  <a:srgbClr val="94A3B8"/>
-                </a:solidFill>
-                <a:latin typeface="Calibri" pitchFamily="34" charset="0"/>
-                <a:ea typeface="Calibri" pitchFamily="34" charset="-122"/>
-                <a:cs typeface="Calibri" pitchFamily="34" charset="-120"/>
+                  <a:srgbClr val="8B95A5"/>
+                </a:solidFill>
+                <a:latin typeface="Verdana" pitchFamily="34" charset="0"/>
+                <a:ea typeface="Verdana" pitchFamily="34" charset="-122"/>
+                <a:cs typeface="Verdana" pitchFamily="34" charset="-120"/>
               </a:rPr>
               <a:t>Side by side. Same task.</a:t>
             </a:r>
@@ -5218,11 +5218,11 @@
             <a:r>
               <a:rPr lang="en-US" sz="2200" dirty="0">
                 <a:solidFill>
-                  <a:srgbClr val="94A3B8"/>
-                </a:solidFill>
-                <a:latin typeface="Calibri" pitchFamily="34" charset="0"/>
-                <a:ea typeface="Calibri" pitchFamily="34" charset="-122"/>
-                <a:cs typeface="Calibri" pitchFamily="34" charset="-120"/>
+                  <a:srgbClr val="8B95A5"/>
+                </a:solidFill>
+                <a:latin typeface="Verdana" pitchFamily="34" charset="0"/>
+                <a:ea typeface="Verdana" pitchFamily="34" charset="-122"/>
+                <a:cs typeface="Verdana" pitchFamily="34" charset="-120"/>
               </a:rPr>
               <a:t>Same information. Just better words.</a:t>
             </a:r>
@@ -5244,7 +5244,7 @@
     <p:bg>
       <p:bgPr>
         <a:solidFill>
-          <a:srgbClr val="0F0F1A"/>
+          <a:srgbClr val="0A2540"/>
         </a:solidFill>
       </p:bgPr>
     </p:bg>
@@ -5277,7 +5277,7 @@
             <a:avLst/>
           </a:prstGeom>
           <a:solidFill>
-            <a:srgbClr val="00B4D8">
+            <a:srgbClr val="635BFF">
               <a:alpha val="4000"/>
             </a:srgbClr>
           </a:solidFill>
@@ -5354,7 +5354,7 @@
     <p:bg>
       <p:bgPr>
         <a:solidFill>
-          <a:srgbClr val="0F0F1A"/>
+          <a:srgbClr val="0A2540"/>
         </a:solidFill>
       </p:bgPr>
     </p:bg>
@@ -5387,7 +5387,7 @@
             <a:avLst/>
           </a:prstGeom>
           <a:solidFill>
-            <a:srgbClr val="00B4D8">
+            <a:srgbClr val="635BFF">
               <a:alpha val="4000"/>
             </a:srgbClr>
           </a:solidFill>
@@ -5411,13 +5411,13 @@
             </a:avLst>
           </a:prstGeom>
           <a:solidFill>
-            <a:srgbClr val="0F0F1A">
+            <a:srgbClr val="0A2540">
               <a:alpha val="50000"/>
             </a:srgbClr>
           </a:solidFill>
           <a:ln w="12700">
             <a:solidFill>
-              <a:srgbClr val="94A3B8"/>
+              <a:srgbClr val="8B95A5"/>
             </a:solidFill>
             <a:prstDash val="solid"/>
           </a:ln>
@@ -5448,17 +5448,17 @@
               <a:buNone/>
             </a:pPr>
             <a:r>
-              <a:rPr lang="en-US" sz="1500" b="1" dirty="0">
-                <a:solidFill>
-                  <a:srgbClr val="94A3B8"/>
-                </a:solidFill>
-                <a:latin typeface="Calibri" pitchFamily="34" charset="0"/>
-                <a:ea typeface="Calibri" pitchFamily="34" charset="-122"/>
-                <a:cs typeface="Calibri" pitchFamily="34" charset="-120"/>
+              <a:rPr lang="en-US" sz="1200" b="1" dirty="0">
+                <a:solidFill>
+                  <a:srgbClr val="8B95A5"/>
+                </a:solidFill>
+                <a:latin typeface="Verdana" pitchFamily="34" charset="0"/>
+                <a:ea typeface="Verdana" pitchFamily="34" charset="-122"/>
+                <a:cs typeface="Verdana" pitchFamily="34" charset="-120"/>
               </a:rPr>
               <a:t>Skeptic</a:t>
             </a:r>
-            <a:endParaRPr lang="en-US" sz="1500" dirty="0"/>
+            <a:endParaRPr lang="en-US" sz="1200" dirty="0"/>
           </a:p>
         </p:txBody>
       </p:sp>
@@ -5487,17 +5487,17 @@
               <a:buNone/>
             </a:pPr>
             <a:r>
-              <a:rPr lang="en-US" sz="1400" dirty="0">
-                <a:solidFill>
-                  <a:srgbClr val="94A3B8"/>
-                </a:solidFill>
-                <a:latin typeface="Calibri" pitchFamily="34" charset="0"/>
-                <a:ea typeface="Calibri" pitchFamily="34" charset="-122"/>
-                <a:cs typeface="Calibri" pitchFamily="34" charset="-120"/>
+              <a:rPr lang="en-US" sz="1100" dirty="0">
+                <a:solidFill>
+                  <a:srgbClr val="8B95A5"/>
+                </a:solidFill>
+                <a:latin typeface="Verdana" pitchFamily="34" charset="0"/>
+                <a:ea typeface="Verdana" pitchFamily="34" charset="-122"/>
+                <a:cs typeface="Verdana" pitchFamily="34" charset="-120"/>
               </a:rPr>
               <a:t>→</a:t>
             </a:r>
-            <a:endParaRPr lang="en-US" sz="1400" dirty="0"/>
+            <a:endParaRPr lang="en-US" sz="1100" dirty="0"/>
           </a:p>
         </p:txBody>
       </p:sp>
@@ -5518,13 +5518,13 @@
             </a:avLst>
           </a:prstGeom>
           <a:solidFill>
-            <a:srgbClr val="00B4D8">
+            <a:srgbClr val="635BFF">
               <a:alpha val="60000"/>
             </a:srgbClr>
           </a:solidFill>
           <a:ln w="25400">
             <a:solidFill>
-              <a:srgbClr val="00B4D8"/>
+              <a:srgbClr val="635BFF"/>
             </a:solidFill>
             <a:prstDash val="solid"/>
           </a:ln>
@@ -5555,17 +5555,17 @@
               <a:buNone/>
             </a:pPr>
             <a:r>
-              <a:rPr lang="en-US" sz="1500" b="1" dirty="0">
+              <a:rPr lang="en-US" sz="1200" b="1" dirty="0">
                 <a:solidFill>
                   <a:srgbClr val="FFFFFF"/>
                 </a:solidFill>
-                <a:latin typeface="Calibri" pitchFamily="34" charset="0"/>
-                <a:ea typeface="Calibri" pitchFamily="34" charset="-122"/>
-                <a:cs typeface="Calibri" pitchFamily="34" charset="-120"/>
+                <a:latin typeface="Verdana" pitchFamily="34" charset="0"/>
+                <a:ea typeface="Verdana" pitchFamily="34" charset="-122"/>
+                <a:cs typeface="Verdana" pitchFamily="34" charset="-120"/>
               </a:rPr>
               <a:t>Explorer</a:t>
             </a:r>
-            <a:endParaRPr lang="en-US" sz="1500" dirty="0"/>
+            <a:endParaRPr lang="en-US" sz="1200" dirty="0"/>
           </a:p>
         </p:txBody>
       </p:sp>
@@ -5594,17 +5594,17 @@
               <a:buNone/>
             </a:pPr>
             <a:r>
-              <a:rPr lang="en-US" sz="1400" dirty="0">
-                <a:solidFill>
-                  <a:srgbClr val="94A3B8"/>
-                </a:solidFill>
-                <a:latin typeface="Calibri" pitchFamily="34" charset="0"/>
-                <a:ea typeface="Calibri" pitchFamily="34" charset="-122"/>
-                <a:cs typeface="Calibri" pitchFamily="34" charset="-120"/>
+              <a:rPr lang="en-US" sz="1100" dirty="0">
+                <a:solidFill>
+                  <a:srgbClr val="8B95A5"/>
+                </a:solidFill>
+                <a:latin typeface="Verdana" pitchFamily="34" charset="0"/>
+                <a:ea typeface="Verdana" pitchFamily="34" charset="-122"/>
+                <a:cs typeface="Verdana" pitchFamily="34" charset="-120"/>
               </a:rPr>
               <a:t>→</a:t>
             </a:r>
-            <a:endParaRPr lang="en-US" sz="1400" dirty="0"/>
+            <a:endParaRPr lang="en-US" sz="1100" dirty="0"/>
           </a:p>
         </p:txBody>
       </p:sp>
@@ -5625,11 +5625,11 @@
             </a:avLst>
           </a:prstGeom>
           <a:solidFill>
-            <a:srgbClr val="00B4D8"/>
+            <a:srgbClr val="635BFF"/>
           </a:solidFill>
           <a:ln w="25400">
             <a:solidFill>
-              <a:srgbClr val="00B4D8"/>
+              <a:srgbClr val="635BFF"/>
             </a:solidFill>
             <a:prstDash val="solid"/>
           </a:ln>
@@ -5660,17 +5660,17 @@
               <a:buNone/>
             </a:pPr>
             <a:r>
-              <a:rPr lang="en-US" sz="1500" b="1" dirty="0">
+              <a:rPr lang="en-US" sz="1200" b="1" dirty="0">
                 <a:solidFill>
                   <a:srgbClr val="FFFFFF"/>
                 </a:solidFill>
-                <a:latin typeface="Calibri" pitchFamily="34" charset="0"/>
-                <a:ea typeface="Calibri" pitchFamily="34" charset="-122"/>
-                <a:cs typeface="Calibri" pitchFamily="34" charset="-120"/>
+                <a:latin typeface="Verdana" pitchFamily="34" charset="0"/>
+                <a:ea typeface="Verdana" pitchFamily="34" charset="-122"/>
+                <a:cs typeface="Verdana" pitchFamily="34" charset="-120"/>
               </a:rPr>
               <a:t>Whisperer</a:t>
             </a:r>
-            <a:endParaRPr lang="en-US" sz="1500" dirty="0"/>
+            <a:endParaRPr lang="en-US" sz="1200" dirty="0"/>
           </a:p>
         </p:txBody>
       </p:sp>
@@ -5699,17 +5699,17 @@
               <a:buNone/>
             </a:pPr>
             <a:r>
-              <a:rPr lang="en-US" sz="1400" dirty="0">
-                <a:solidFill>
-                  <a:srgbClr val="94A3B8"/>
-                </a:solidFill>
-                <a:latin typeface="Calibri" pitchFamily="34" charset="0"/>
-                <a:ea typeface="Calibri" pitchFamily="34" charset="-122"/>
-                <a:cs typeface="Calibri" pitchFamily="34" charset="-120"/>
+              <a:rPr lang="en-US" sz="1100" dirty="0">
+                <a:solidFill>
+                  <a:srgbClr val="8B95A5"/>
+                </a:solidFill>
+                <a:latin typeface="Verdana" pitchFamily="34" charset="0"/>
+                <a:ea typeface="Verdana" pitchFamily="34" charset="-122"/>
+                <a:cs typeface="Verdana" pitchFamily="34" charset="-120"/>
               </a:rPr>
               <a:t>→</a:t>
             </a:r>
-            <a:endParaRPr lang="en-US" sz="1400" dirty="0"/>
+            <a:endParaRPr lang="en-US" sz="1100" dirty="0"/>
           </a:p>
         </p:txBody>
       </p:sp>
@@ -5730,13 +5730,13 @@
             </a:avLst>
           </a:prstGeom>
           <a:solidFill>
-            <a:srgbClr val="0F0F1A">
+            <a:srgbClr val="0A2540">
               <a:alpha val="50000"/>
             </a:srgbClr>
           </a:solidFill>
           <a:ln w="12700">
             <a:solidFill>
-              <a:srgbClr val="94A3B8"/>
+              <a:srgbClr val="8B95A5"/>
             </a:solidFill>
             <a:prstDash val="solid"/>
           </a:ln>
@@ -5767,17 +5767,17 @@
               <a:buNone/>
             </a:pPr>
             <a:r>
-              <a:rPr lang="en-US" sz="1500" b="1" dirty="0">
-                <a:solidFill>
-                  <a:srgbClr val="94A3B8"/>
-                </a:solidFill>
-                <a:latin typeface="Calibri" pitchFamily="34" charset="0"/>
-                <a:ea typeface="Calibri" pitchFamily="34" charset="-122"/>
-                <a:cs typeface="Calibri" pitchFamily="34" charset="-120"/>
+              <a:rPr lang="en-US" sz="1200" b="1" dirty="0">
+                <a:solidFill>
+                  <a:srgbClr val="8B95A5"/>
+                </a:solidFill>
+                <a:latin typeface="Verdana" pitchFamily="34" charset="0"/>
+                <a:ea typeface="Verdana" pitchFamily="34" charset="-122"/>
+                <a:cs typeface="Verdana" pitchFamily="34" charset="-120"/>
               </a:rPr>
               <a:t>Strategist</a:t>
             </a:r>
-            <a:endParaRPr lang="en-US" sz="1500" dirty="0"/>
+            <a:endParaRPr lang="en-US" sz="1200" dirty="0"/>
           </a:p>
         </p:txBody>
       </p:sp>
@@ -5806,17 +5806,17 @@
               <a:buNone/>
             </a:pPr>
             <a:r>
-              <a:rPr lang="en-US" sz="1400" dirty="0">
-                <a:solidFill>
-                  <a:srgbClr val="94A3B8"/>
-                </a:solidFill>
-                <a:latin typeface="Calibri" pitchFamily="34" charset="0"/>
-                <a:ea typeface="Calibri" pitchFamily="34" charset="-122"/>
-                <a:cs typeface="Calibri" pitchFamily="34" charset="-120"/>
+              <a:rPr lang="en-US" sz="1100" dirty="0">
+                <a:solidFill>
+                  <a:srgbClr val="8B95A5"/>
+                </a:solidFill>
+                <a:latin typeface="Verdana" pitchFamily="34" charset="0"/>
+                <a:ea typeface="Verdana" pitchFamily="34" charset="-122"/>
+                <a:cs typeface="Verdana" pitchFamily="34" charset="-120"/>
               </a:rPr>
               <a:t>→</a:t>
             </a:r>
-            <a:endParaRPr lang="en-US" sz="1400" dirty="0"/>
+            <a:endParaRPr lang="en-US" sz="1100" dirty="0"/>
           </a:p>
         </p:txBody>
       </p:sp>
@@ -5837,13 +5837,13 @@
             </a:avLst>
           </a:prstGeom>
           <a:solidFill>
-            <a:srgbClr val="0F0F1A">
+            <a:srgbClr val="0A2540">
               <a:alpha val="50000"/>
             </a:srgbClr>
           </a:solidFill>
           <a:ln w="12700">
             <a:solidFill>
-              <a:srgbClr val="94A3B8"/>
+              <a:srgbClr val="8B95A5"/>
             </a:solidFill>
             <a:prstDash val="solid"/>
           </a:ln>
@@ -5874,17 +5874,17 @@
               <a:buNone/>
             </a:pPr>
             <a:r>
-              <a:rPr lang="en-US" sz="1500" b="1" dirty="0">
-                <a:solidFill>
-                  <a:srgbClr val="94A3B8"/>
-                </a:solidFill>
-                <a:latin typeface="Calibri" pitchFamily="34" charset="0"/>
-                <a:ea typeface="Calibri" pitchFamily="34" charset="-122"/>
-                <a:cs typeface="Calibri" pitchFamily="34" charset="-120"/>
+              <a:rPr lang="en-US" sz="1200" b="1" dirty="0">
+                <a:solidFill>
+                  <a:srgbClr val="8B95A5"/>
+                </a:solidFill>
+                <a:latin typeface="Verdana" pitchFamily="34" charset="0"/>
+                <a:ea typeface="Verdana" pitchFamily="34" charset="-122"/>
+                <a:cs typeface="Verdana" pitchFamily="34" charset="-120"/>
               </a:rPr>
               <a:t>Operator</a:t>
             </a:r>
-            <a:endParaRPr lang="en-US" sz="1500" dirty="0"/>
+            <a:endParaRPr lang="en-US" sz="1200" dirty="0"/>
           </a:p>
         </p:txBody>
       </p:sp>
@@ -5913,17 +5913,17 @@
               <a:buNone/>
             </a:pPr>
             <a:r>
-              <a:rPr lang="en-US" sz="1400" dirty="0">
-                <a:solidFill>
-                  <a:srgbClr val="94A3B8"/>
-                </a:solidFill>
-                <a:latin typeface="Calibri" pitchFamily="34" charset="0"/>
-                <a:ea typeface="Calibri" pitchFamily="34" charset="-122"/>
-                <a:cs typeface="Calibri" pitchFamily="34" charset="-120"/>
+              <a:rPr lang="en-US" sz="1100" dirty="0">
+                <a:solidFill>
+                  <a:srgbClr val="8B95A5"/>
+                </a:solidFill>
+                <a:latin typeface="Verdana" pitchFamily="34" charset="0"/>
+                <a:ea typeface="Verdana" pitchFamily="34" charset="-122"/>
+                <a:cs typeface="Verdana" pitchFamily="34" charset="-120"/>
               </a:rPr>
               <a:t>→</a:t>
             </a:r>
-            <a:endParaRPr lang="en-US" sz="1400" dirty="0"/>
+            <a:endParaRPr lang="en-US" sz="1100" dirty="0"/>
           </a:p>
         </p:txBody>
       </p:sp>
@@ -5944,13 +5944,13 @@
             </a:avLst>
           </a:prstGeom>
           <a:solidFill>
-            <a:srgbClr val="0F0F1A">
+            <a:srgbClr val="0A2540">
               <a:alpha val="50000"/>
             </a:srgbClr>
           </a:solidFill>
           <a:ln w="12700">
             <a:solidFill>
-              <a:srgbClr val="94A3B8"/>
+              <a:srgbClr val="8B95A5"/>
             </a:solidFill>
             <a:prstDash val="solid"/>
           </a:ln>
@@ -5981,17 +5981,17 @@
               <a:buNone/>
             </a:pPr>
             <a:r>
-              <a:rPr lang="en-US" sz="1500" b="1" dirty="0">
-                <a:solidFill>
-                  <a:srgbClr val="94A3B8"/>
-                </a:solidFill>
-                <a:latin typeface="Calibri" pitchFamily="34" charset="0"/>
-                <a:ea typeface="Calibri" pitchFamily="34" charset="-122"/>
-                <a:cs typeface="Calibri" pitchFamily="34" charset="-120"/>
+              <a:rPr lang="en-US" sz="1200" b="1" dirty="0">
+                <a:solidFill>
+                  <a:srgbClr val="8B95A5"/>
+                </a:solidFill>
+                <a:latin typeface="Verdana" pitchFamily="34" charset="0"/>
+                <a:ea typeface="Verdana" pitchFamily="34" charset="-122"/>
+                <a:cs typeface="Verdana" pitchFamily="34" charset="-120"/>
               </a:rPr>
               <a:t>Orchestrator</a:t>
             </a:r>
-            <a:endParaRPr lang="en-US" sz="1500" dirty="0"/>
+            <a:endParaRPr lang="en-US" sz="1200" dirty="0"/>
           </a:p>
         </p:txBody>
       </p:sp>
@@ -6020,17 +6020,17 @@
               <a:buNone/>
             </a:pPr>
             <a:r>
-              <a:rPr lang="en-US" sz="1400" dirty="0">
-                <a:solidFill>
-                  <a:srgbClr val="94A3B8"/>
-                </a:solidFill>
-                <a:latin typeface="Calibri" pitchFamily="34" charset="0"/>
-                <a:ea typeface="Calibri" pitchFamily="34" charset="-122"/>
-                <a:cs typeface="Calibri" pitchFamily="34" charset="-120"/>
+              <a:rPr lang="en-US" sz="1100" dirty="0">
+                <a:solidFill>
+                  <a:srgbClr val="8B95A5"/>
+                </a:solidFill>
+                <a:latin typeface="Verdana" pitchFamily="34" charset="0"/>
+                <a:ea typeface="Verdana" pitchFamily="34" charset="-122"/>
+                <a:cs typeface="Verdana" pitchFamily="34" charset="-120"/>
               </a:rPr>
               <a:t>→</a:t>
             </a:r>
-            <a:endParaRPr lang="en-US" sz="1400" dirty="0"/>
+            <a:endParaRPr lang="en-US" sz="1100" dirty="0"/>
           </a:p>
         </p:txBody>
       </p:sp>
@@ -6051,13 +6051,13 @@
             </a:avLst>
           </a:prstGeom>
           <a:solidFill>
-            <a:srgbClr val="0F0F1A">
+            <a:srgbClr val="0A2540">
               <a:alpha val="50000"/>
             </a:srgbClr>
           </a:solidFill>
           <a:ln w="12700">
             <a:solidFill>
-              <a:srgbClr val="94A3B8"/>
+              <a:srgbClr val="8B95A5"/>
             </a:solidFill>
             <a:prstDash val="dash"/>
           </a:ln>
@@ -6088,17 +6088,17 @@
               <a:buNone/>
             </a:pPr>
             <a:r>
-              <a:rPr lang="en-US" sz="1500" b="1" dirty="0">
-                <a:solidFill>
-                  <a:srgbClr val="94A3B8"/>
-                </a:solidFill>
-                <a:latin typeface="Calibri" pitchFamily="34" charset="0"/>
-                <a:ea typeface="Calibri" pitchFamily="34" charset="-122"/>
-                <a:cs typeface="Calibri" pitchFamily="34" charset="-120"/>
+              <a:rPr lang="en-US" sz="1200" b="1" dirty="0">
+                <a:solidFill>
+                  <a:srgbClr val="8B95A5"/>
+                </a:solidFill>
+                <a:latin typeface="Verdana" pitchFamily="34" charset="0"/>
+                <a:ea typeface="Verdana" pitchFamily="34" charset="-122"/>
+                <a:cs typeface="Verdana" pitchFamily="34" charset="-120"/>
               </a:rPr>
               <a:t>Builder</a:t>
             </a:r>
-            <a:endParaRPr lang="en-US" sz="1500" dirty="0"/>
+            <a:endParaRPr lang="en-US" sz="1200" dirty="0"/>
           </a:p>
         </p:txBody>
       </p:sp>
@@ -6129,7 +6129,7 @@
             <a:r>
               <a:rPr lang="en-US" sz="3200" b="1" dirty="0">
                 <a:solidFill>
-                  <a:srgbClr val="00B4D8"/>
+                  <a:srgbClr val="635BFF"/>
                 </a:solidFill>
                 <a:latin typeface="Georgia" pitchFamily="34" charset="0"/>
                 <a:ea typeface="Georgia" pitchFamily="34" charset="-122"/>
@@ -6155,7 +6155,7 @@
     <p:bg>
       <p:bgPr>
         <a:solidFill>
-          <a:srgbClr val="0F0F1A"/>
+          <a:srgbClr val="0A2540"/>
         </a:solidFill>
       </p:bgPr>
     </p:bg>
@@ -6188,7 +6188,7 @@
             <a:avLst/>
           </a:prstGeom>
           <a:solidFill>
-            <a:srgbClr val="00B4D8">
+            <a:srgbClr val="635BFF">
               <a:alpha val="4000"/>
             </a:srgbClr>
           </a:solidFill>
@@ -6261,11 +6261,11 @@
             <a:r>
               <a:rPr lang="en-US" sz="2800" dirty="0">
                 <a:solidFill>
-                  <a:srgbClr val="94A3B8"/>
-                </a:solidFill>
-                <a:latin typeface="Calibri" pitchFamily="34" charset="0"/>
-                <a:ea typeface="Calibri" pitchFamily="34" charset="-122"/>
-                <a:cs typeface="Calibri" pitchFamily="34" charset="-120"/>
+                  <a:srgbClr val="8B95A5"/>
+                </a:solidFill>
+                <a:latin typeface="Verdana" pitchFamily="34" charset="0"/>
+                <a:ea typeface="Verdana" pitchFamily="34" charset="-122"/>
+                <a:cs typeface="Verdana" pitchFamily="34" charset="-120"/>
               </a:rPr>
               <a:t>You know how to talk to AI.</a:t>
             </a:r>
@@ -6287,7 +6287,7 @@
     <p:bg>
       <p:bgPr>
         <a:solidFill>
-          <a:srgbClr val="0F0F1A"/>
+          <a:srgbClr val="0A2540"/>
         </a:solidFill>
       </p:bgPr>
     </p:bg>
@@ -6320,7 +6320,7 @@
             <a:avLst/>
           </a:prstGeom>
           <a:solidFill>
-            <a:srgbClr val="00B4D8">
+            <a:srgbClr val="635BFF">
               <a:alpha val="4000"/>
             </a:srgbClr>
           </a:solidFill>
@@ -6354,7 +6354,7 @@
             <a:r>
               <a:rPr lang="en-US" sz="4400" b="1" dirty="0">
                 <a:solidFill>
-                  <a:srgbClr val="00B4D8"/>
+                  <a:srgbClr val="635BFF"/>
                 </a:solidFill>
                 <a:latin typeface="Georgia" pitchFamily="34" charset="0"/>
                 <a:ea typeface="Georgia" pitchFamily="34" charset="-122"/>
@@ -6371,7 +6371,7 @@
             <a:r>
               <a:rPr lang="en-US" sz="4400" b="1" dirty="0">
                 <a:solidFill>
-                  <a:srgbClr val="00B4D8"/>
+                  <a:srgbClr val="635BFF"/>
                 </a:solidFill>
                 <a:latin typeface="Georgia" pitchFamily="34" charset="0"/>
                 <a:ea typeface="Georgia" pitchFamily="34" charset="-122"/>
@@ -6397,7 +6397,7 @@
     <p:bg>
       <p:bgPr>
         <a:solidFill>
-          <a:srgbClr val="0F0F1A"/>
+          <a:srgbClr val="0A2540"/>
         </a:solidFill>
       </p:bgPr>
     </p:bg>
@@ -6430,7 +6430,7 @@
             <a:avLst/>
           </a:prstGeom>
           <a:solidFill>
-            <a:srgbClr val="00B4D8">
+            <a:srgbClr val="635BFF">
               <a:alpha val="4000"/>
             </a:srgbClr>
           </a:solidFill>
@@ -6464,7 +6464,7 @@
             <a:r>
               <a:rPr lang="en-US" sz="2800" i="1" dirty="0">
                 <a:solidFill>
-                  <a:srgbClr val="00B4D8"/>
+                  <a:srgbClr val="635BFF"/>
                 </a:solidFill>
                 <a:latin typeface="Georgia" pitchFamily="34" charset="0"/>
                 <a:ea typeface="Georgia" pitchFamily="34" charset="-122"/>
@@ -6481,7 +6481,7 @@
             <a:r>
               <a:rPr lang="en-US" sz="2800" i="1" dirty="0">
                 <a:solidFill>
-                  <a:srgbClr val="00B4D8"/>
+                  <a:srgbClr val="635BFF"/>
                 </a:solidFill>
                 <a:latin typeface="Georgia" pitchFamily="34" charset="0"/>
                 <a:ea typeface="Georgia" pitchFamily="34" charset="-122"/>
@@ -6507,7 +6507,7 @@
     <p:bg>
       <p:bgPr>
         <a:solidFill>
-          <a:srgbClr val="0F0F1A"/>
+          <a:srgbClr val="0A2540"/>
         </a:solidFill>
       </p:bgPr>
     </p:bg>
@@ -6540,7 +6540,7 @@
             <a:avLst/>
           </a:prstGeom>
           <a:solidFill>
-            <a:srgbClr val="00B4D8">
+            <a:srgbClr val="635BFF">
               <a:alpha val="4000"/>
             </a:srgbClr>
           </a:solidFill>
@@ -6634,7 +6634,7 @@
     <p:bg>
       <p:bgPr>
         <a:solidFill>
-          <a:srgbClr val="0F0F1A"/>
+          <a:srgbClr val="0A2540"/>
         </a:solidFill>
       </p:bgPr>
     </p:bg>
@@ -6667,7 +6667,7 @@
             <a:avLst/>
           </a:prstGeom>
           <a:solidFill>
-            <a:srgbClr val="00B4D8">
+            <a:srgbClr val="635BFF">
               <a:alpha val="4000"/>
             </a:srgbClr>
           </a:solidFill>
@@ -6703,9 +6703,9 @@
                 <a:solidFill>
                   <a:srgbClr val="FFFFFF"/>
                 </a:solidFill>
-                <a:latin typeface="Calibri" pitchFamily="34" charset="0"/>
-                <a:ea typeface="Calibri" pitchFamily="34" charset="-122"/>
-                <a:cs typeface="Calibri" pitchFamily="34" charset="-120"/>
+                <a:latin typeface="Verdana" pitchFamily="34" charset="0"/>
+                <a:ea typeface="Verdana" pitchFamily="34" charset="-122"/>
+                <a:cs typeface="Verdana" pitchFamily="34" charset="-120"/>
               </a:rPr>
               <a:t>You use apps.</a:t>
             </a:r>
@@ -6720,9 +6720,9 @@
                 <a:solidFill>
                   <a:srgbClr val="FFFFFF"/>
                 </a:solidFill>
-                <a:latin typeface="Calibri" pitchFamily="34" charset="0"/>
-                <a:ea typeface="Calibri" pitchFamily="34" charset="-122"/>
-                <a:cs typeface="Calibri" pitchFamily="34" charset="-120"/>
+                <a:latin typeface="Verdana" pitchFamily="34" charset="0"/>
+                <a:ea typeface="Verdana" pitchFamily="34" charset="-122"/>
+                <a:cs typeface="Verdana" pitchFamily="34" charset="-120"/>
               </a:rPr>
               <a:t>Apps use agents.</a:t>
             </a:r>
@@ -6737,9 +6737,9 @@
                 <a:solidFill>
                   <a:srgbClr val="FFFFFF"/>
                 </a:solidFill>
-                <a:latin typeface="Calibri" pitchFamily="34" charset="0"/>
-                <a:ea typeface="Calibri" pitchFamily="34" charset="-122"/>
-                <a:cs typeface="Calibri" pitchFamily="34" charset="-120"/>
+                <a:latin typeface="Verdana" pitchFamily="34" charset="0"/>
+                <a:ea typeface="Verdana" pitchFamily="34" charset="-122"/>
+                <a:cs typeface="Verdana" pitchFamily="34" charset="-120"/>
               </a:rPr>
               <a:t>Agents talk to LLMs.</a:t>
             </a:r>
@@ -6774,11 +6774,11 @@
             <a:r>
               <a:rPr lang="en-US" sz="2800" dirty="0">
                 <a:solidFill>
-                  <a:srgbClr val="94A3B8"/>
-                </a:solidFill>
-                <a:latin typeface="Calibri" pitchFamily="34" charset="0"/>
-                <a:ea typeface="Calibri" pitchFamily="34" charset="-122"/>
-                <a:cs typeface="Calibri" pitchFamily="34" charset="-120"/>
+                  <a:srgbClr val="8B95A5"/>
+                </a:solidFill>
+                <a:latin typeface="Verdana" pitchFamily="34" charset="0"/>
+                <a:ea typeface="Verdana" pitchFamily="34" charset="-122"/>
+                <a:cs typeface="Verdana" pitchFamily="34" charset="-120"/>
               </a:rPr>
               <a:t>You only need to care about the first two.</a:t>
             </a:r>
@@ -6800,7 +6800,7 @@
     <p:bg>
       <p:bgPr>
         <a:solidFill>
-          <a:srgbClr val="0F0F1A"/>
+          <a:srgbClr val="0A2540"/>
         </a:solidFill>
       </p:bgPr>
     </p:bg>
@@ -6833,7 +6833,7 @@
             <a:avLst/>
           </a:prstGeom>
           <a:solidFill>
-            <a:srgbClr val="00B4D8">
+            <a:srgbClr val="635BFF">
               <a:alpha val="4000"/>
             </a:srgbClr>
           </a:solidFill>
@@ -6867,11 +6867,11 @@
             <a:r>
               <a:rPr lang="en-US" sz="2200" b="1" dirty="0">
                 <a:solidFill>
-                  <a:srgbClr val="00B4D8"/>
-                </a:solidFill>
-                <a:latin typeface="Calibri" pitchFamily="34" charset="0"/>
-                <a:ea typeface="Calibri" pitchFamily="34" charset="-122"/>
-                <a:cs typeface="Calibri" pitchFamily="34" charset="-120"/>
+                  <a:srgbClr val="635BFF"/>
+                </a:solidFill>
+                <a:latin typeface="Verdana" pitchFamily="34" charset="0"/>
+                <a:ea typeface="Verdana" pitchFamily="34" charset="-122"/>
+                <a:cs typeface="Verdana" pitchFamily="34" charset="-120"/>
               </a:rPr>
               <a:t>YOUR TURN</a:t>
             </a:r>
@@ -6945,11 +6945,11 @@
             <a:r>
               <a:rPr lang="en-US" sz="2200" dirty="0">
                 <a:solidFill>
-                  <a:srgbClr val="94A3B8"/>
-                </a:solidFill>
-                <a:latin typeface="Calibri" pitchFamily="34" charset="0"/>
-                <a:ea typeface="Calibri" pitchFamily="34" charset="-122"/>
-                <a:cs typeface="Calibri" pitchFamily="34" charset="-120"/>
+                  <a:srgbClr val="8B95A5"/>
+                </a:solidFill>
+                <a:latin typeface="Verdana" pitchFamily="34" charset="0"/>
+                <a:ea typeface="Verdana" pitchFamily="34" charset="-122"/>
+                <a:cs typeface="Verdana" pitchFamily="34" charset="-120"/>
               </a:rPr>
               <a:t>Pick a real task you do at work —</a:t>
             </a:r>
@@ -6962,11 +6962,11 @@
             <a:r>
               <a:rPr lang="en-US" sz="2200" dirty="0">
                 <a:solidFill>
-                  <a:srgbClr val="94A3B8"/>
-                </a:solidFill>
-                <a:latin typeface="Calibri" pitchFamily="34" charset="0"/>
-                <a:ea typeface="Calibri" pitchFamily="34" charset="-122"/>
-                <a:cs typeface="Calibri" pitchFamily="34" charset="-120"/>
+                  <a:srgbClr val="8B95A5"/>
+                </a:solidFill>
+                <a:latin typeface="Verdana" pitchFamily="34" charset="0"/>
+                <a:ea typeface="Verdana" pitchFamily="34" charset="-122"/>
+                <a:cs typeface="Verdana" pitchFamily="34" charset="-120"/>
               </a:rPr>
               <a:t>a proposal, an email, a summary, a plan.</a:t>
             </a:r>
@@ -6979,11 +6979,11 @@
             <a:r>
               <a:rPr lang="en-US" sz="2200" dirty="0">
                 <a:solidFill>
-                  <a:srgbClr val="94A3B8"/>
-                </a:solidFill>
-                <a:latin typeface="Calibri" pitchFamily="34" charset="0"/>
-                <a:ea typeface="Calibri" pitchFamily="34" charset="-122"/>
-                <a:cs typeface="Calibri" pitchFamily="34" charset="-120"/>
+                  <a:srgbClr val="8B95A5"/>
+                </a:solidFill>
+                <a:latin typeface="Verdana" pitchFamily="34" charset="0"/>
+                <a:ea typeface="Verdana" pitchFamily="34" charset="-122"/>
+                <a:cs typeface="Verdana" pitchFamily="34" charset="-120"/>
               </a:rPr>
               <a:t>Or follow along with our example.</a:t>
             </a:r>
@@ -7005,7 +7005,7 @@
     <p:bg>
       <p:bgPr>
         <a:solidFill>
-          <a:srgbClr val="0F0F1A"/>
+          <a:srgbClr val="0A2540"/>
         </a:solidFill>
       </p:bgPr>
     </p:bg>
@@ -7038,7 +7038,7 @@
             <a:avLst/>
           </a:prstGeom>
           <a:solidFill>
-            <a:srgbClr val="00B4D8">
+            <a:srgbClr val="635BFF">
               <a:alpha val="4000"/>
             </a:srgbClr>
           </a:solidFill>
@@ -7115,7 +7115,7 @@
     <p:bg>
       <p:bgPr>
         <a:solidFill>
-          <a:srgbClr val="0F0F1A"/>
+          <a:srgbClr val="0A2540"/>
         </a:solidFill>
       </p:bgPr>
     </p:bg>
@@ -7148,7 +7148,7 @@
             <a:avLst/>
           </a:prstGeom>
           <a:solidFill>
-            <a:srgbClr val="00B4D8">
+            <a:srgbClr val="635BFF">
               <a:alpha val="4000"/>
             </a:srgbClr>
           </a:solidFill>
@@ -7182,11 +7182,11 @@
             <a:r>
               <a:rPr lang="en-US" sz="2200" b="1" dirty="0">
                 <a:solidFill>
-                  <a:srgbClr val="00B4D8"/>
-                </a:solidFill>
-                <a:latin typeface="Calibri" pitchFamily="34" charset="0"/>
-                <a:ea typeface="Calibri" pitchFamily="34" charset="-122"/>
-                <a:cs typeface="Calibri" pitchFamily="34" charset="-120"/>
+                  <a:srgbClr val="635BFF"/>
+                </a:solidFill>
+                <a:latin typeface="Verdana" pitchFamily="34" charset="0"/>
+                <a:ea typeface="Verdana" pitchFamily="34" charset="-122"/>
+                <a:cs typeface="Verdana" pitchFamily="34" charset="-120"/>
               </a:rPr>
               <a:t>YOUR TURN</a:t>
             </a:r>
@@ -7277,11 +7277,11 @@
             <a:r>
               <a:rPr lang="en-US" sz="2200" dirty="0">
                 <a:solidFill>
-                  <a:srgbClr val="94A3B8"/>
-                </a:solidFill>
-                <a:latin typeface="Calibri" pitchFamily="34" charset="0"/>
-                <a:ea typeface="Calibri" pitchFamily="34" charset="-122"/>
-                <a:cs typeface="Calibri" pitchFamily="34" charset="-120"/>
+                  <a:srgbClr val="8B95A5"/>
+                </a:solidFill>
+                <a:latin typeface="Verdana" pitchFamily="34" charset="0"/>
+                <a:ea typeface="Verdana" pitchFamily="34" charset="-122"/>
+                <a:cs typeface="Verdana" pitchFamily="34" charset="-120"/>
               </a:rPr>
               <a:t>Don’t overthink it. Type what you’d normally type.</a:t>
             </a:r>
@@ -7294,11 +7294,11 @@
             <a:r>
               <a:rPr lang="en-US" sz="2200" dirty="0">
                 <a:solidFill>
-                  <a:srgbClr val="94A3B8"/>
-                </a:solidFill>
-                <a:latin typeface="Calibri" pitchFamily="34" charset="0"/>
-                <a:ea typeface="Calibri" pitchFamily="34" charset="-122"/>
-                <a:cs typeface="Calibri" pitchFamily="34" charset="-120"/>
+                  <a:srgbClr val="8B95A5"/>
+                </a:solidFill>
+                <a:latin typeface="Verdana" pitchFamily="34" charset="0"/>
+                <a:ea typeface="Verdana" pitchFamily="34" charset="-122"/>
+                <a:cs typeface="Verdana" pitchFamily="34" charset="-120"/>
               </a:rPr>
               <a:t>Read the output. Sound familiar?</a:t>
             </a:r>
@@ -7320,7 +7320,7 @@
     <p:bg>
       <p:bgPr>
         <a:solidFill>
-          <a:srgbClr val="F8F9FA"/>
+          <a:srgbClr val="FFFFFF"/>
         </a:solidFill>
       </p:bgPr>
     </p:bg>
@@ -7365,7 +7365,7 @@
             <a:r>
               <a:rPr lang="en-US" sz="4400" b="1" dirty="0">
                 <a:solidFill>
-                  <a:srgbClr val="1E293B"/>
+                  <a:srgbClr val="1A1F36"/>
                 </a:solidFill>
                 <a:latin typeface="Georgia" pitchFamily="34" charset="0"/>
                 <a:ea typeface="Georgia" pitchFamily="34" charset="-122"/>
@@ -7404,11 +7404,11 @@
             <a:r>
               <a:rPr lang="en-US" sz="2000" i="1" dirty="0">
                 <a:solidFill>
-                  <a:srgbClr val="00B4D8"/>
-                </a:solidFill>
-                <a:latin typeface="Calibri" pitchFamily="34" charset="0"/>
-                <a:ea typeface="Calibri" pitchFamily="34" charset="-122"/>
-                <a:cs typeface="Calibri" pitchFamily="34" charset="-120"/>
+                  <a:srgbClr val="635BFF"/>
+                </a:solidFill>
+                <a:latin typeface="Verdana" pitchFamily="34" charset="0"/>
+                <a:ea typeface="Verdana" pitchFamily="34" charset="-122"/>
+                <a:cs typeface="Verdana" pitchFamily="34" charset="-120"/>
               </a:rPr>
               <a:t>vs. talking to a stranger</a:t>
             </a:r>
@@ -7431,7 +7431,7 @@
             <a:avLst/>
           </a:prstGeom>
           <a:solidFill>
-            <a:srgbClr val="FEE2E2"/>
+            <a:srgbClr val="FEE2E8"/>
           </a:solidFill>
           <a:ln/>
         </p:spPr>
@@ -7451,7 +7451,7 @@
             <a:avLst/>
           </a:prstGeom>
           <a:solidFill>
-            <a:srgbClr val="E63946"/>
+            <a:srgbClr val="FF6B8A"/>
           </a:solidFill>
           <a:ln/>
         </p:spPr>
@@ -7483,11 +7483,11 @@
             <a:r>
               <a:rPr lang="en-US" sz="2200" dirty="0">
                 <a:solidFill>
-                  <a:srgbClr val="1E293B"/>
-                </a:solidFill>
-                <a:latin typeface="Calibri" pitchFamily="34" charset="0"/>
-                <a:ea typeface="Calibri" pitchFamily="34" charset="-122"/>
-                <a:cs typeface="Calibri" pitchFamily="34" charset="-120"/>
+                  <a:srgbClr val="1A1F36"/>
+                </a:solidFill>
+                <a:latin typeface="Verdana" pitchFamily="34" charset="0"/>
+                <a:ea typeface="Verdana" pitchFamily="34" charset="-122"/>
+                <a:cs typeface="Verdana" pitchFamily="34" charset="-120"/>
               </a:rPr>
               <a:t>Write me a proposal for</a:t>
             </a:r>
@@ -7500,11 +7500,11 @@
             <a:r>
               <a:rPr lang="en-US" sz="2200" dirty="0">
                 <a:solidFill>
-                  <a:srgbClr val="1E293B"/>
-                </a:solidFill>
-                <a:latin typeface="Calibri" pitchFamily="34" charset="0"/>
-                <a:ea typeface="Calibri" pitchFamily="34" charset="-122"/>
-                <a:cs typeface="Calibri" pitchFamily="34" charset="-120"/>
+                  <a:srgbClr val="1A1F36"/>
+                </a:solidFill>
+                <a:latin typeface="Verdana" pitchFamily="34" charset="0"/>
+                <a:ea typeface="Verdana" pitchFamily="34" charset="-122"/>
+                <a:cs typeface="Verdana" pitchFamily="34" charset="-120"/>
               </a:rPr>
               <a:t>improving our onboarding process.</a:t>
             </a:r>
@@ -7547,7 +7547,7 @@
             <a:avLst/>
           </a:prstGeom>
           <a:solidFill>
-            <a:srgbClr val="2D936C"/>
+            <a:srgbClr val="09825D"/>
           </a:solidFill>
           <a:ln/>
         </p:spPr>
@@ -7579,11 +7579,11 @@
             <a:r>
               <a:rPr lang="en-US" sz="2200" dirty="0">
                 <a:solidFill>
-                  <a:srgbClr val="1E293B"/>
-                </a:solidFill>
-                <a:latin typeface="Calibri" pitchFamily="34" charset="0"/>
-                <a:ea typeface="Calibri" pitchFamily="34" charset="-122"/>
-                <a:cs typeface="Calibri" pitchFamily="34" charset="-120"/>
+                  <a:srgbClr val="1A1F36"/>
+                </a:solidFill>
+                <a:latin typeface="Verdana" pitchFamily="34" charset="0"/>
+                <a:ea typeface="Verdana" pitchFamily="34" charset="-122"/>
+                <a:cs typeface="Verdana" pitchFamily="34" charset="-120"/>
               </a:rPr>
               <a:t>You are a senior HR operations</a:t>
             </a:r>
@@ -7596,11 +7596,11 @@
             <a:r>
               <a:rPr lang="en-US" sz="2200" dirty="0">
                 <a:solidFill>
-                  <a:srgbClr val="1E293B"/>
-                </a:solidFill>
-                <a:latin typeface="Calibri" pitchFamily="34" charset="0"/>
-                <a:ea typeface="Calibri" pitchFamily="34" charset="-122"/>
-                <a:cs typeface="Calibri" pitchFamily="34" charset="-120"/>
+                  <a:srgbClr val="1A1F36"/>
+                </a:solidFill>
+                <a:latin typeface="Verdana" pitchFamily="34" charset="0"/>
+                <a:ea typeface="Verdana" pitchFamily="34" charset="-122"/>
+                <a:cs typeface="Verdana" pitchFamily="34" charset="-120"/>
               </a:rPr>
               <a:t>consultant. Write me a proposal for</a:t>
             </a:r>
@@ -7613,11 +7613,11 @@
             <a:r>
               <a:rPr lang="en-US" sz="2200" dirty="0">
                 <a:solidFill>
-                  <a:srgbClr val="1E293B"/>
-                </a:solidFill>
-                <a:latin typeface="Calibri" pitchFamily="34" charset="0"/>
-                <a:ea typeface="Calibri" pitchFamily="34" charset="-122"/>
-                <a:cs typeface="Calibri" pitchFamily="34" charset="-120"/>
+                  <a:srgbClr val="1A1F36"/>
+                </a:solidFill>
+                <a:latin typeface="Verdana" pitchFamily="34" charset="0"/>
+                <a:ea typeface="Verdana" pitchFamily="34" charset="-122"/>
+                <a:cs typeface="Verdana" pitchFamily="34" charset="-120"/>
               </a:rPr>
               <a:t>improving our onboarding process.</a:t>
             </a:r>
@@ -7639,7 +7639,7 @@
     <p:bg>
       <p:bgPr>
         <a:solidFill>
-          <a:srgbClr val="0F0F1A"/>
+          <a:srgbClr val="0A2540"/>
         </a:solidFill>
       </p:bgPr>
     </p:bg>
@@ -7672,7 +7672,7 @@
             <a:avLst/>
           </a:prstGeom>
           <a:solidFill>
-            <a:srgbClr val="00B4D8">
+            <a:srgbClr val="635BFF">
               <a:alpha val="4000"/>
             </a:srgbClr>
           </a:solidFill>
@@ -7706,11 +7706,11 @@
             <a:r>
               <a:rPr lang="en-US" sz="2200" b="1" dirty="0">
                 <a:solidFill>
-                  <a:srgbClr val="00B4D8"/>
-                </a:solidFill>
-                <a:latin typeface="Calibri" pitchFamily="34" charset="0"/>
-                <a:ea typeface="Calibri" pitchFamily="34" charset="-122"/>
-                <a:cs typeface="Calibri" pitchFamily="34" charset="-120"/>
+                  <a:srgbClr val="635BFF"/>
+                </a:solidFill>
+                <a:latin typeface="Verdana" pitchFamily="34" charset="0"/>
+                <a:ea typeface="Verdana" pitchFamily="34" charset="-122"/>
+                <a:cs typeface="Verdana" pitchFamily="34" charset="-120"/>
               </a:rPr>
               <a:t>YOUR TURN</a:t>
             </a:r>
@@ -7784,11 +7784,11 @@
             <a:r>
               <a:rPr lang="en-US" sz="2200" dirty="0">
                 <a:solidFill>
-                  <a:srgbClr val="94A3B8"/>
-                </a:solidFill>
-                <a:latin typeface="Calibri" pitchFamily="34" charset="0"/>
-                <a:ea typeface="Calibri" pitchFamily="34" charset="-122"/>
-                <a:cs typeface="Calibri" pitchFamily="34" charset="-120"/>
+                  <a:srgbClr val="8B95A5"/>
+                </a:solidFill>
+                <a:latin typeface="Verdana" pitchFamily="34" charset="0"/>
+                <a:ea typeface="Verdana" pitchFamily="34" charset="-122"/>
+                <a:cs typeface="Verdana" pitchFamily="34" charset="-120"/>
               </a:rPr>
               <a:t>"You are a senior [your role] at [your company]."</a:t>
             </a:r>
@@ -7801,11 +7801,11 @@
             <a:r>
               <a:rPr lang="en-US" sz="2200" dirty="0">
                 <a:solidFill>
-                  <a:srgbClr val="94A3B8"/>
-                </a:solidFill>
-                <a:latin typeface="Calibri" pitchFamily="34" charset="0"/>
-                <a:ea typeface="Calibri" pitchFamily="34" charset="-122"/>
-                <a:cs typeface="Calibri" pitchFamily="34" charset="-120"/>
+                  <a:srgbClr val="8B95A5"/>
+                </a:solidFill>
+                <a:latin typeface="Verdana" pitchFamily="34" charset="0"/>
+                <a:ea typeface="Verdana" pitchFamily="34" charset="-122"/>
+                <a:cs typeface="Verdana" pitchFamily="34" charset="-120"/>
               </a:rPr>
               <a:t>Paste it at the beginning. Re-run.</a:t>
             </a:r>
@@ -7818,11 +7818,11 @@
             <a:r>
               <a:rPr lang="en-US" sz="2200" dirty="0">
                 <a:solidFill>
-                  <a:srgbClr val="94A3B8"/>
-                </a:solidFill>
-                <a:latin typeface="Calibri" pitchFamily="34" charset="0"/>
-                <a:ea typeface="Calibri" pitchFamily="34" charset="-122"/>
-                <a:cs typeface="Calibri" pitchFamily="34" charset="-120"/>
+                  <a:srgbClr val="8B95A5"/>
+                </a:solidFill>
+                <a:latin typeface="Verdana" pitchFamily="34" charset="0"/>
+                <a:ea typeface="Verdana" pitchFamily="34" charset="-122"/>
+                <a:cs typeface="Verdana" pitchFamily="34" charset="-120"/>
               </a:rPr>
               <a:t>Compare to your first output.</a:t>
             </a:r>
